--- a/asset/asset-factory.pptx
+++ b/asset/asset-factory.pptx
@@ -4,9 +4,18 @@
   <p:sldMasterIdLst>
     <p:sldMasterId id="2147483648" r:id="rId1"/>
   </p:sldMasterIdLst>
+  <p:notesMasterIdLst>
+    <p:notesMasterId r:id="rId10"/>
+  </p:notesMasterIdLst>
   <p:sldIdLst>
     <p:sldId id="256" r:id="rId2"/>
     <p:sldId id="257" r:id="rId3"/>
+    <p:sldId id="258" r:id="rId4"/>
+    <p:sldId id="259" r:id="rId5"/>
+    <p:sldId id="260" r:id="rId6"/>
+    <p:sldId id="261" r:id="rId7"/>
+    <p:sldId id="262" r:id="rId8"/>
+    <p:sldId id="263" r:id="rId9"/>
   </p:sldIdLst>
   <p:sldSz cx="12192000" cy="6858000"/>
   <p:notesSz cx="6858000" cy="9144000"/>
@@ -111,6 +120,1389 @@
     </p:ext>
   </p:extLst>
 </p:presentation>
+</file>
+
+<file path=ppt/notesMasters/notesMaster1.xml><?xml version="1.0" encoding="utf-8"?>
+<p:notesMaster xmlns:a="http://schemas.openxmlformats.org/drawingml/2006/main" xmlns:r="http://schemas.openxmlformats.org/officeDocument/2006/relationships" xmlns:p="http://schemas.openxmlformats.org/presentationml/2006/main">
+  <p:cSld>
+    <p:bg>
+      <p:bgRef idx="1001">
+        <a:schemeClr val="bg1"/>
+      </p:bgRef>
+    </p:bg>
+    <p:spTree>
+      <p:nvGrpSpPr>
+        <p:cNvPr id="1" name=""/>
+        <p:cNvGrpSpPr/>
+        <p:nvPr/>
+      </p:nvGrpSpPr>
+      <p:grpSpPr>
+        <a:xfrm>
+          <a:off x="0" y="0"/>
+          <a:ext cx="0" cy="0"/>
+          <a:chOff x="0" y="0"/>
+          <a:chExt cx="0" cy="0"/>
+        </a:xfrm>
+      </p:grpSpPr>
+      <p:sp>
+        <p:nvSpPr>
+          <p:cNvPr id="2" name="ヘッダー プレースホルダー 1"/>
+          <p:cNvSpPr>
+            <a:spLocks noGrp="1"/>
+          </p:cNvSpPr>
+          <p:nvPr>
+            <p:ph type="hdr" sz="quarter"/>
+          </p:nvPr>
+        </p:nvSpPr>
+        <p:spPr>
+          <a:xfrm>
+            <a:off x="0" y="0"/>
+            <a:ext cx="2971800" cy="458788"/>
+          </a:xfrm>
+          <a:prstGeom prst="rect">
+            <a:avLst/>
+          </a:prstGeom>
+        </p:spPr>
+        <p:txBody>
+          <a:bodyPr vert="horz" lIns="91440" tIns="45720" rIns="91440" bIns="45720" rtlCol="0"/>
+          <a:lstStyle>
+            <a:lvl1pPr algn="l">
+              <a:defRPr sz="1200"/>
+            </a:lvl1pPr>
+          </a:lstStyle>
+          <a:p>
+            <a:endParaRPr kumimoji="1" lang="ja-JP" altLang="en-US"/>
+          </a:p>
+        </p:txBody>
+      </p:sp>
+      <p:sp>
+        <p:nvSpPr>
+          <p:cNvPr id="3" name="日付プレースホルダー 2"/>
+          <p:cNvSpPr>
+            <a:spLocks noGrp="1"/>
+          </p:cNvSpPr>
+          <p:nvPr>
+            <p:ph type="dt" idx="1"/>
+          </p:nvPr>
+        </p:nvSpPr>
+        <p:spPr>
+          <a:xfrm>
+            <a:off x="3884613" y="0"/>
+            <a:ext cx="2971800" cy="458788"/>
+          </a:xfrm>
+          <a:prstGeom prst="rect">
+            <a:avLst/>
+          </a:prstGeom>
+        </p:spPr>
+        <p:txBody>
+          <a:bodyPr vert="horz" lIns="91440" tIns="45720" rIns="91440" bIns="45720" rtlCol="0"/>
+          <a:lstStyle>
+            <a:lvl1pPr algn="r">
+              <a:defRPr sz="1200"/>
+            </a:lvl1pPr>
+          </a:lstStyle>
+          <a:p>
+            <a:fld id="{D41B059B-4E36-4ACC-A1FF-2458B92DECBF}" type="datetimeFigureOut">
+              <a:rPr kumimoji="1" lang="ja-JP" altLang="en-US" smtClean="0"/>
+              <a:t>2025/5/6</a:t>
+            </a:fld>
+            <a:endParaRPr kumimoji="1" lang="ja-JP" altLang="en-US"/>
+          </a:p>
+        </p:txBody>
+      </p:sp>
+      <p:sp>
+        <p:nvSpPr>
+          <p:cNvPr id="4" name="スライド イメージ プレースホルダー 3"/>
+          <p:cNvSpPr>
+            <a:spLocks noGrp="1" noRot="1" noChangeAspect="1"/>
+          </p:cNvSpPr>
+          <p:nvPr>
+            <p:ph type="sldImg" idx="2"/>
+          </p:nvPr>
+        </p:nvSpPr>
+        <p:spPr>
+          <a:xfrm>
+            <a:off x="685800" y="1143000"/>
+            <a:ext cx="5486400" cy="3086100"/>
+          </a:xfrm>
+          <a:prstGeom prst="rect">
+            <a:avLst/>
+          </a:prstGeom>
+          <a:noFill/>
+          <a:ln w="12700">
+            <a:solidFill>
+              <a:prstClr val="black"/>
+            </a:solidFill>
+          </a:ln>
+        </p:spPr>
+        <p:txBody>
+          <a:bodyPr vert="horz" lIns="91440" tIns="45720" rIns="91440" bIns="45720" rtlCol="0" anchor="ctr"/>
+          <a:lstStyle/>
+          <a:p>
+            <a:endParaRPr lang="ja-JP" altLang="en-US"/>
+          </a:p>
+        </p:txBody>
+      </p:sp>
+      <p:sp>
+        <p:nvSpPr>
+          <p:cNvPr id="5" name="ノート プレースホルダー 4"/>
+          <p:cNvSpPr>
+            <a:spLocks noGrp="1"/>
+          </p:cNvSpPr>
+          <p:nvPr>
+            <p:ph type="body" sz="quarter" idx="3"/>
+          </p:nvPr>
+        </p:nvSpPr>
+        <p:spPr>
+          <a:xfrm>
+            <a:off x="685800" y="4400550"/>
+            <a:ext cx="5486400" cy="3600450"/>
+          </a:xfrm>
+          <a:prstGeom prst="rect">
+            <a:avLst/>
+          </a:prstGeom>
+        </p:spPr>
+        <p:txBody>
+          <a:bodyPr vert="horz" lIns="91440" tIns="45720" rIns="91440" bIns="45720" rtlCol="0"/>
+          <a:lstStyle/>
+          <a:p>
+            <a:pPr lvl="0"/>
+            <a:r>
+              <a:rPr kumimoji="1" lang="ja-JP" altLang="en-US"/>
+              <a:t>マスター テキストの書式設定</a:t>
+            </a:r>
+          </a:p>
+          <a:p>
+            <a:pPr lvl="1"/>
+            <a:r>
+              <a:rPr kumimoji="1" lang="ja-JP" altLang="en-US"/>
+              <a:t>第 </a:t>
+            </a:r>
+            <a:r>
+              <a:rPr kumimoji="1" lang="en-US" altLang="ja-JP"/>
+              <a:t>2 </a:t>
+            </a:r>
+            <a:r>
+              <a:rPr kumimoji="1" lang="ja-JP" altLang="en-US"/>
+              <a:t>レベル</a:t>
+            </a:r>
+          </a:p>
+          <a:p>
+            <a:pPr lvl="2"/>
+            <a:r>
+              <a:rPr kumimoji="1" lang="ja-JP" altLang="en-US"/>
+              <a:t>第 </a:t>
+            </a:r>
+            <a:r>
+              <a:rPr kumimoji="1" lang="en-US" altLang="ja-JP"/>
+              <a:t>3 </a:t>
+            </a:r>
+            <a:r>
+              <a:rPr kumimoji="1" lang="ja-JP" altLang="en-US"/>
+              <a:t>レベル</a:t>
+            </a:r>
+          </a:p>
+          <a:p>
+            <a:pPr lvl="3"/>
+            <a:r>
+              <a:rPr kumimoji="1" lang="ja-JP" altLang="en-US"/>
+              <a:t>第 </a:t>
+            </a:r>
+            <a:r>
+              <a:rPr kumimoji="1" lang="en-US" altLang="ja-JP"/>
+              <a:t>4 </a:t>
+            </a:r>
+            <a:r>
+              <a:rPr kumimoji="1" lang="ja-JP" altLang="en-US"/>
+              <a:t>レベル</a:t>
+            </a:r>
+          </a:p>
+          <a:p>
+            <a:pPr lvl="4"/>
+            <a:r>
+              <a:rPr kumimoji="1" lang="ja-JP" altLang="en-US"/>
+              <a:t>第 </a:t>
+            </a:r>
+            <a:r>
+              <a:rPr kumimoji="1" lang="en-US" altLang="ja-JP"/>
+              <a:t>5 </a:t>
+            </a:r>
+            <a:r>
+              <a:rPr kumimoji="1" lang="ja-JP" altLang="en-US"/>
+              <a:t>レベル</a:t>
+            </a:r>
+          </a:p>
+        </p:txBody>
+      </p:sp>
+      <p:sp>
+        <p:nvSpPr>
+          <p:cNvPr id="6" name="フッター プレースホルダー 5"/>
+          <p:cNvSpPr>
+            <a:spLocks noGrp="1"/>
+          </p:cNvSpPr>
+          <p:nvPr>
+            <p:ph type="ftr" sz="quarter" idx="4"/>
+          </p:nvPr>
+        </p:nvSpPr>
+        <p:spPr>
+          <a:xfrm>
+            <a:off x="0" y="8685213"/>
+            <a:ext cx="2971800" cy="458787"/>
+          </a:xfrm>
+          <a:prstGeom prst="rect">
+            <a:avLst/>
+          </a:prstGeom>
+        </p:spPr>
+        <p:txBody>
+          <a:bodyPr vert="horz" lIns="91440" tIns="45720" rIns="91440" bIns="45720" rtlCol="0" anchor="b"/>
+          <a:lstStyle>
+            <a:lvl1pPr algn="l">
+              <a:defRPr sz="1200"/>
+            </a:lvl1pPr>
+          </a:lstStyle>
+          <a:p>
+            <a:endParaRPr kumimoji="1" lang="ja-JP" altLang="en-US"/>
+          </a:p>
+        </p:txBody>
+      </p:sp>
+      <p:sp>
+        <p:nvSpPr>
+          <p:cNvPr id="7" name="スライド番号プレースホルダー 6"/>
+          <p:cNvSpPr>
+            <a:spLocks noGrp="1"/>
+          </p:cNvSpPr>
+          <p:nvPr>
+            <p:ph type="sldNum" sz="quarter" idx="5"/>
+          </p:nvPr>
+        </p:nvSpPr>
+        <p:spPr>
+          <a:xfrm>
+            <a:off x="3884613" y="8685213"/>
+            <a:ext cx="2971800" cy="458787"/>
+          </a:xfrm>
+          <a:prstGeom prst="rect">
+            <a:avLst/>
+          </a:prstGeom>
+        </p:spPr>
+        <p:txBody>
+          <a:bodyPr vert="horz" lIns="91440" tIns="45720" rIns="91440" bIns="45720" rtlCol="0" anchor="b"/>
+          <a:lstStyle>
+            <a:lvl1pPr algn="r">
+              <a:defRPr sz="1200"/>
+            </a:lvl1pPr>
+          </a:lstStyle>
+          <a:p>
+            <a:fld id="{816B5BE4-11DE-4F26-9BFB-79944BBF670C}" type="slidenum">
+              <a:rPr kumimoji="1" lang="ja-JP" altLang="en-US" smtClean="0"/>
+              <a:t>‹#›</a:t>
+            </a:fld>
+            <a:endParaRPr kumimoji="1" lang="ja-JP" altLang="en-US"/>
+          </a:p>
+        </p:txBody>
+      </p:sp>
+    </p:spTree>
+    <p:extLst>
+      <p:ext uri="{BB962C8B-B14F-4D97-AF65-F5344CB8AC3E}">
+        <p14:creationId xmlns:p14="http://schemas.microsoft.com/office/powerpoint/2010/main" val="1242426203"/>
+      </p:ext>
+    </p:extLst>
+  </p:cSld>
+  <p:clrMap bg1="lt1" tx1="dk1" bg2="lt2" tx2="dk2" accent1="accent1" accent2="accent2" accent3="accent3" accent4="accent4" accent5="accent5" accent6="accent6" hlink="hlink" folHlink="folHlink"/>
+  <p:notesStyle>
+    <a:lvl1pPr marL="0" algn="l" defTabSz="914400" rtl="0" eaLnBrk="1" latinLnBrk="0" hangingPunct="1">
+      <a:defRPr kumimoji="1" sz="1200" kern="1200">
+        <a:solidFill>
+          <a:schemeClr val="tx1"/>
+        </a:solidFill>
+        <a:latin typeface="+mn-lt"/>
+        <a:ea typeface="+mn-ea"/>
+        <a:cs typeface="+mn-cs"/>
+      </a:defRPr>
+    </a:lvl1pPr>
+    <a:lvl2pPr marL="457200" algn="l" defTabSz="914400" rtl="0" eaLnBrk="1" latinLnBrk="0" hangingPunct="1">
+      <a:defRPr kumimoji="1" sz="1200" kern="1200">
+        <a:solidFill>
+          <a:schemeClr val="tx1"/>
+        </a:solidFill>
+        <a:latin typeface="+mn-lt"/>
+        <a:ea typeface="+mn-ea"/>
+        <a:cs typeface="+mn-cs"/>
+      </a:defRPr>
+    </a:lvl2pPr>
+    <a:lvl3pPr marL="914400" algn="l" defTabSz="914400" rtl="0" eaLnBrk="1" latinLnBrk="0" hangingPunct="1">
+      <a:defRPr kumimoji="1" sz="1200" kern="1200">
+        <a:solidFill>
+          <a:schemeClr val="tx1"/>
+        </a:solidFill>
+        <a:latin typeface="+mn-lt"/>
+        <a:ea typeface="+mn-ea"/>
+        <a:cs typeface="+mn-cs"/>
+      </a:defRPr>
+    </a:lvl3pPr>
+    <a:lvl4pPr marL="1371600" algn="l" defTabSz="914400" rtl="0" eaLnBrk="1" latinLnBrk="0" hangingPunct="1">
+      <a:defRPr kumimoji="1" sz="1200" kern="1200">
+        <a:solidFill>
+          <a:schemeClr val="tx1"/>
+        </a:solidFill>
+        <a:latin typeface="+mn-lt"/>
+        <a:ea typeface="+mn-ea"/>
+        <a:cs typeface="+mn-cs"/>
+      </a:defRPr>
+    </a:lvl4pPr>
+    <a:lvl5pPr marL="1828800" algn="l" defTabSz="914400" rtl="0" eaLnBrk="1" latinLnBrk="0" hangingPunct="1">
+      <a:defRPr kumimoji="1" sz="1200" kern="1200">
+        <a:solidFill>
+          <a:schemeClr val="tx1"/>
+        </a:solidFill>
+        <a:latin typeface="+mn-lt"/>
+        <a:ea typeface="+mn-ea"/>
+        <a:cs typeface="+mn-cs"/>
+      </a:defRPr>
+    </a:lvl5pPr>
+    <a:lvl6pPr marL="2286000" algn="l" defTabSz="914400" rtl="0" eaLnBrk="1" latinLnBrk="0" hangingPunct="1">
+      <a:defRPr kumimoji="1" sz="1200" kern="1200">
+        <a:solidFill>
+          <a:schemeClr val="tx1"/>
+        </a:solidFill>
+        <a:latin typeface="+mn-lt"/>
+        <a:ea typeface="+mn-ea"/>
+        <a:cs typeface="+mn-cs"/>
+      </a:defRPr>
+    </a:lvl6pPr>
+    <a:lvl7pPr marL="2743200" algn="l" defTabSz="914400" rtl="0" eaLnBrk="1" latinLnBrk="0" hangingPunct="1">
+      <a:defRPr kumimoji="1" sz="1200" kern="1200">
+        <a:solidFill>
+          <a:schemeClr val="tx1"/>
+        </a:solidFill>
+        <a:latin typeface="+mn-lt"/>
+        <a:ea typeface="+mn-ea"/>
+        <a:cs typeface="+mn-cs"/>
+      </a:defRPr>
+    </a:lvl7pPr>
+    <a:lvl8pPr marL="3200400" algn="l" defTabSz="914400" rtl="0" eaLnBrk="1" latinLnBrk="0" hangingPunct="1">
+      <a:defRPr kumimoji="1" sz="1200" kern="1200">
+        <a:solidFill>
+          <a:schemeClr val="tx1"/>
+        </a:solidFill>
+        <a:latin typeface="+mn-lt"/>
+        <a:ea typeface="+mn-ea"/>
+        <a:cs typeface="+mn-cs"/>
+      </a:defRPr>
+    </a:lvl8pPr>
+    <a:lvl9pPr marL="3657600" algn="l" defTabSz="914400" rtl="0" eaLnBrk="1" latinLnBrk="0" hangingPunct="1">
+      <a:defRPr kumimoji="1" sz="1200" kern="1200">
+        <a:solidFill>
+          <a:schemeClr val="tx1"/>
+        </a:solidFill>
+        <a:latin typeface="+mn-lt"/>
+        <a:ea typeface="+mn-ea"/>
+        <a:cs typeface="+mn-cs"/>
+      </a:defRPr>
+    </a:lvl9pPr>
+  </p:notesStyle>
+</p:notesMaster>
+</file>
+
+<file path=ppt/notesSlides/notesSlide1.xml><?xml version="1.0" encoding="utf-8"?>
+<p:notes xmlns:a="http://schemas.openxmlformats.org/drawingml/2006/main" xmlns:r="http://schemas.openxmlformats.org/officeDocument/2006/relationships" xmlns:p="http://schemas.openxmlformats.org/presentationml/2006/main">
+  <p:cSld>
+    <p:spTree>
+      <p:nvGrpSpPr>
+        <p:cNvPr id="1" name=""/>
+        <p:cNvGrpSpPr/>
+        <p:nvPr/>
+      </p:nvGrpSpPr>
+      <p:grpSpPr>
+        <a:xfrm>
+          <a:off x="0" y="0"/>
+          <a:ext cx="0" cy="0"/>
+          <a:chOff x="0" y="0"/>
+          <a:chExt cx="0" cy="0"/>
+        </a:xfrm>
+      </p:grpSpPr>
+      <p:sp>
+        <p:nvSpPr>
+          <p:cNvPr id="2" name="スライド イメージ プレースホルダー 1"/>
+          <p:cNvSpPr>
+            <a:spLocks noGrp="1" noRot="1" noChangeAspect="1"/>
+          </p:cNvSpPr>
+          <p:nvPr>
+            <p:ph type="sldImg"/>
+          </p:nvPr>
+        </p:nvSpPr>
+        <p:spPr/>
+      </p:sp>
+      <p:sp>
+        <p:nvSpPr>
+          <p:cNvPr id="3" name="ノート プレースホルダー 2"/>
+          <p:cNvSpPr>
+            <a:spLocks noGrp="1"/>
+          </p:cNvSpPr>
+          <p:nvPr>
+            <p:ph type="body" idx="1"/>
+          </p:nvPr>
+        </p:nvSpPr>
+        <p:spPr/>
+        <p:txBody>
+          <a:bodyPr/>
+          <a:lstStyle/>
+          <a:p>
+            <a:r>
+              <a:rPr kumimoji="1" lang="en-US" altLang="ja-JP" dirty="0"/>
+              <a:t>TOPPERS/ASP3</a:t>
+            </a:r>
+          </a:p>
+          <a:p>
+            <a:r>
+              <a:rPr kumimoji="1" lang="en-US" altLang="ja-JP" dirty="0"/>
+              <a:t>C</a:t>
+            </a:r>
+            <a:r>
+              <a:rPr kumimoji="1" lang="ja-JP" altLang="en-US" dirty="0"/>
+              <a:t>言語で記述された</a:t>
+            </a:r>
+            <a:r>
+              <a:rPr kumimoji="1" lang="en-US" altLang="ja-JP" dirty="0"/>
+              <a:t>RTOS</a:t>
+            </a:r>
+          </a:p>
+          <a:p>
+            <a:r>
+              <a:rPr kumimoji="1" lang="en-US" altLang="ja-JP" dirty="0"/>
+              <a:t>Linux</a:t>
+            </a:r>
+            <a:r>
+              <a:rPr kumimoji="1" lang="ja-JP" altLang="en-US" dirty="0"/>
+              <a:t>上にエミュレータを生成し、その上に疑似的に</a:t>
+            </a:r>
+            <a:r>
+              <a:rPr kumimoji="1" lang="en-US" altLang="ja-JP" dirty="0"/>
+              <a:t>OS</a:t>
+            </a:r>
+            <a:r>
+              <a:rPr kumimoji="1" lang="ja-JP" altLang="en-US" dirty="0"/>
+              <a:t>を起動する</a:t>
+            </a:r>
+            <a:endParaRPr kumimoji="1" lang="en-US" altLang="ja-JP" dirty="0"/>
+          </a:p>
+          <a:p>
+            <a:r>
+              <a:rPr kumimoji="1" lang="en-US" altLang="ja-JP" dirty="0"/>
+              <a:t>RTOS</a:t>
+            </a:r>
+            <a:r>
+              <a:rPr kumimoji="1" lang="ja-JP" altLang="en-US" dirty="0"/>
+              <a:t>を実現するために、ハードウェア資源へのアクセスと時間管理アルゴリズムを記述し、そのインターフェースを提供する</a:t>
+            </a:r>
+            <a:endParaRPr kumimoji="1" lang="en-US" altLang="ja-JP" dirty="0"/>
+          </a:p>
+          <a:p>
+            <a:r>
+              <a:rPr kumimoji="1" lang="ja-JP" altLang="en-US" dirty="0"/>
+              <a:t>この貢献として、利用者はマルチスレッドプログラミングや割り込み処理などに関する複雑な実装を省略できる</a:t>
+            </a:r>
+            <a:endParaRPr kumimoji="1" lang="en-US" altLang="ja-JP" dirty="0"/>
+          </a:p>
+          <a:p>
+            <a:r>
+              <a:rPr kumimoji="1" lang="en-US" altLang="ja-JP" dirty="0"/>
+              <a:t>Raspberry PI 4</a:t>
+            </a:r>
+            <a:r>
+              <a:rPr kumimoji="1" lang="ja-JP" altLang="en-US" dirty="0"/>
+              <a:t>に対応している</a:t>
+            </a:r>
+            <a:endParaRPr kumimoji="1" lang="en-US" altLang="ja-JP" dirty="0"/>
+          </a:p>
+          <a:p>
+            <a:endParaRPr kumimoji="1" lang="en-US" altLang="ja-JP" dirty="0"/>
+          </a:p>
+          <a:p>
+            <a:r>
+              <a:rPr kumimoji="1" lang="en-US" altLang="ja-JP" dirty="0"/>
+              <a:t>https://www.toppers.jp/asp-kernel.html</a:t>
+            </a:r>
+            <a:endParaRPr kumimoji="1" lang="ja-JP" altLang="en-US" dirty="0"/>
+          </a:p>
+        </p:txBody>
+      </p:sp>
+      <p:sp>
+        <p:nvSpPr>
+          <p:cNvPr id="4" name="スライド番号プレースホルダー 3"/>
+          <p:cNvSpPr>
+            <a:spLocks noGrp="1"/>
+          </p:cNvSpPr>
+          <p:nvPr>
+            <p:ph type="sldNum" sz="quarter" idx="5"/>
+          </p:nvPr>
+        </p:nvSpPr>
+        <p:spPr/>
+        <p:txBody>
+          <a:bodyPr/>
+          <a:lstStyle/>
+          <a:p>
+            <a:fld id="{816B5BE4-11DE-4F26-9BFB-79944BBF670C}" type="slidenum">
+              <a:rPr kumimoji="1" lang="ja-JP" altLang="en-US" smtClean="0"/>
+              <a:t>4</a:t>
+            </a:fld>
+            <a:endParaRPr kumimoji="1" lang="ja-JP" altLang="en-US"/>
+          </a:p>
+        </p:txBody>
+      </p:sp>
+    </p:spTree>
+    <p:extLst>
+      <p:ext uri="{BB962C8B-B14F-4D97-AF65-F5344CB8AC3E}">
+        <p14:creationId xmlns:p14="http://schemas.microsoft.com/office/powerpoint/2010/main" val="1295232397"/>
+      </p:ext>
+    </p:extLst>
+  </p:cSld>
+  <p:clrMapOvr>
+    <a:masterClrMapping/>
+  </p:clrMapOvr>
+</p:notes>
+</file>
+
+<file path=ppt/notesSlides/notesSlide2.xml><?xml version="1.0" encoding="utf-8"?>
+<p:notes xmlns:a="http://schemas.openxmlformats.org/drawingml/2006/main" xmlns:r="http://schemas.openxmlformats.org/officeDocument/2006/relationships" xmlns:p="http://schemas.openxmlformats.org/presentationml/2006/main">
+  <p:cSld>
+    <p:spTree>
+      <p:nvGrpSpPr>
+        <p:cNvPr id="1" name="">
+          <a:extLst>
+            <a:ext uri="{FF2B5EF4-FFF2-40B4-BE49-F238E27FC236}">
+              <a16:creationId xmlns:a16="http://schemas.microsoft.com/office/drawing/2014/main" id="{0E6DA1FB-025F-6F07-0357-6011A468FFC5}"/>
+            </a:ext>
+          </a:extLst>
+        </p:cNvPr>
+        <p:cNvGrpSpPr/>
+        <p:nvPr/>
+      </p:nvGrpSpPr>
+      <p:grpSpPr>
+        <a:xfrm>
+          <a:off x="0" y="0"/>
+          <a:ext cx="0" cy="0"/>
+          <a:chOff x="0" y="0"/>
+          <a:chExt cx="0" cy="0"/>
+        </a:xfrm>
+      </p:grpSpPr>
+      <p:sp>
+        <p:nvSpPr>
+          <p:cNvPr id="2" name="スライド イメージ プレースホルダー 1">
+            <a:extLst>
+              <a:ext uri="{FF2B5EF4-FFF2-40B4-BE49-F238E27FC236}">
+                <a16:creationId xmlns:a16="http://schemas.microsoft.com/office/drawing/2014/main" id="{2A28BD8F-E809-6A0C-C735-147808386BEB}"/>
+              </a:ext>
+            </a:extLst>
+          </p:cNvPr>
+          <p:cNvSpPr>
+            <a:spLocks noGrp="1" noRot="1" noChangeAspect="1"/>
+          </p:cNvSpPr>
+          <p:nvPr>
+            <p:ph type="sldImg"/>
+          </p:nvPr>
+        </p:nvSpPr>
+        <p:spPr/>
+      </p:sp>
+      <p:sp>
+        <p:nvSpPr>
+          <p:cNvPr id="3" name="ノート プレースホルダー 2">
+            <a:extLst>
+              <a:ext uri="{FF2B5EF4-FFF2-40B4-BE49-F238E27FC236}">
+                <a16:creationId xmlns:a16="http://schemas.microsoft.com/office/drawing/2014/main" id="{EEA0B446-6EC3-D4CD-166B-5B6611FC089A}"/>
+              </a:ext>
+            </a:extLst>
+          </p:cNvPr>
+          <p:cNvSpPr>
+            <a:spLocks noGrp="1"/>
+          </p:cNvSpPr>
+          <p:nvPr>
+            <p:ph type="body" idx="1"/>
+          </p:nvPr>
+        </p:nvSpPr>
+        <p:spPr/>
+        <p:txBody>
+          <a:bodyPr/>
+          <a:lstStyle/>
+          <a:p>
+            <a:r>
+              <a:rPr kumimoji="1" lang="en-US" altLang="ja-JP" dirty="0"/>
+              <a:t>Lego</a:t>
+            </a:r>
+            <a:r>
+              <a:rPr kumimoji="1" lang="ja-JP" altLang="en-US" dirty="0"/>
+              <a:t>社提供</a:t>
+            </a:r>
+            <a:endParaRPr kumimoji="1" lang="en-US" altLang="ja-JP" dirty="0"/>
+          </a:p>
+          <a:p>
+            <a:r>
+              <a:rPr kumimoji="1" lang="en-US" altLang="ja-JP" dirty="0"/>
+              <a:t>Lego</a:t>
+            </a:r>
+            <a:r>
+              <a:rPr kumimoji="1" lang="ja-JP" altLang="en-US" dirty="0"/>
+              <a:t>社の</a:t>
+            </a:r>
+            <a:r>
+              <a:rPr kumimoji="1" lang="en-US" altLang="ja-JP" dirty="0"/>
+              <a:t>SPIKE</a:t>
+            </a:r>
+            <a:r>
+              <a:rPr kumimoji="1" lang="ja-JP" altLang="en-US" dirty="0"/>
+              <a:t>へのアクセスのためのモジュール</a:t>
+            </a:r>
+            <a:endParaRPr kumimoji="1" lang="en-US" altLang="ja-JP" dirty="0"/>
+          </a:p>
+          <a:p>
+            <a:endParaRPr kumimoji="1" lang="en-US" altLang="ja-JP" dirty="0"/>
+          </a:p>
+          <a:p>
+            <a:r>
+              <a:rPr kumimoji="1" lang="en-US" altLang="ja-JP" dirty="0"/>
+              <a:t>Lego</a:t>
+            </a:r>
+            <a:r>
+              <a:rPr kumimoji="1" lang="ja-JP" altLang="en-US" dirty="0"/>
+              <a:t>社はデンマークの会社らしい。他方</a:t>
+            </a:r>
+            <a:r>
+              <a:rPr kumimoji="1" lang="en-US" altLang="ja-JP" dirty="0"/>
+              <a:t>TOPPERS/ASP3</a:t>
+            </a:r>
+            <a:r>
+              <a:rPr kumimoji="1" lang="ja-JP" altLang="en-US" dirty="0"/>
+              <a:t>は日本が中心のプロジェクトである。海外のソフトウェアが日本のソフトウェアに依存するなんて、なんだか誇らしい！</a:t>
+            </a:r>
+            <a:endParaRPr kumimoji="1" lang="en-US" altLang="ja-JP" dirty="0"/>
+          </a:p>
+          <a:p>
+            <a:endParaRPr kumimoji="1" lang="en-US" altLang="ja-JP" dirty="0"/>
+          </a:p>
+          <a:p>
+            <a:r>
+              <a:rPr kumimoji="1" lang="en-US" altLang="ja-JP" dirty="0"/>
+              <a:t>https://education.lego.com/en-us/products/lego-education-spike-prime-set/45678/#spike%E2%84%A2-prime</a:t>
+            </a:r>
+          </a:p>
+          <a:p>
+            <a:r>
+              <a:rPr kumimoji="1" lang="en-US" altLang="ja-JP" dirty="0"/>
+              <a:t>https://spike-rt.github.io/spike-rt/en/html/modules.html</a:t>
+            </a:r>
+          </a:p>
+          <a:p>
+            <a:r>
+              <a:rPr kumimoji="1" lang="en-US" altLang="ja-JP" dirty="0"/>
+              <a:t>https://github.com/spike-rt/spike-rt</a:t>
+            </a:r>
+          </a:p>
+          <a:p>
+            <a:r>
+              <a:rPr kumimoji="1" lang="en-US" altLang="ja-JP" dirty="0"/>
+              <a:t>https://docs.pybricks.com/en/latest/pupdevices/index.html</a:t>
+            </a:r>
+            <a:endParaRPr kumimoji="1" lang="ja-JP" altLang="en-US" dirty="0"/>
+          </a:p>
+        </p:txBody>
+      </p:sp>
+      <p:sp>
+        <p:nvSpPr>
+          <p:cNvPr id="4" name="スライド番号プレースホルダー 3">
+            <a:extLst>
+              <a:ext uri="{FF2B5EF4-FFF2-40B4-BE49-F238E27FC236}">
+                <a16:creationId xmlns:a16="http://schemas.microsoft.com/office/drawing/2014/main" id="{528A07B5-E33D-EF4A-CA06-E6D83B627D1A}"/>
+              </a:ext>
+            </a:extLst>
+          </p:cNvPr>
+          <p:cNvSpPr>
+            <a:spLocks noGrp="1"/>
+          </p:cNvSpPr>
+          <p:nvPr>
+            <p:ph type="sldNum" sz="quarter" idx="5"/>
+          </p:nvPr>
+        </p:nvSpPr>
+        <p:spPr/>
+        <p:txBody>
+          <a:bodyPr/>
+          <a:lstStyle/>
+          <a:p>
+            <a:fld id="{816B5BE4-11DE-4F26-9BFB-79944BBF670C}" type="slidenum">
+              <a:rPr kumimoji="1" lang="ja-JP" altLang="en-US" smtClean="0"/>
+              <a:t>5</a:t>
+            </a:fld>
+            <a:endParaRPr kumimoji="1" lang="ja-JP" altLang="en-US"/>
+          </a:p>
+        </p:txBody>
+      </p:sp>
+    </p:spTree>
+    <p:extLst>
+      <p:ext uri="{BB962C8B-B14F-4D97-AF65-F5344CB8AC3E}">
+        <p14:creationId xmlns:p14="http://schemas.microsoft.com/office/powerpoint/2010/main" val="2309534303"/>
+      </p:ext>
+    </p:extLst>
+  </p:cSld>
+  <p:clrMapOvr>
+    <a:masterClrMapping/>
+  </p:clrMapOvr>
+</p:notes>
+</file>
+
+<file path=ppt/notesSlides/notesSlide3.xml><?xml version="1.0" encoding="utf-8"?>
+<p:notes xmlns:a="http://schemas.openxmlformats.org/drawingml/2006/main" xmlns:r="http://schemas.openxmlformats.org/officeDocument/2006/relationships" xmlns:p="http://schemas.openxmlformats.org/presentationml/2006/main">
+  <p:cSld>
+    <p:spTree>
+      <p:nvGrpSpPr>
+        <p:cNvPr id="1" name="">
+          <a:extLst>
+            <a:ext uri="{FF2B5EF4-FFF2-40B4-BE49-F238E27FC236}">
+              <a16:creationId xmlns:a16="http://schemas.microsoft.com/office/drawing/2014/main" id="{3C380419-5C95-89A7-0DA7-22109643E2DB}"/>
+            </a:ext>
+          </a:extLst>
+        </p:cNvPr>
+        <p:cNvGrpSpPr/>
+        <p:nvPr/>
+      </p:nvGrpSpPr>
+      <p:grpSpPr>
+        <a:xfrm>
+          <a:off x="0" y="0"/>
+          <a:ext cx="0" cy="0"/>
+          <a:chOff x="0" y="0"/>
+          <a:chExt cx="0" cy="0"/>
+        </a:xfrm>
+      </p:grpSpPr>
+      <p:sp>
+        <p:nvSpPr>
+          <p:cNvPr id="2" name="スライド イメージ プレースホルダー 1">
+            <a:extLst>
+              <a:ext uri="{FF2B5EF4-FFF2-40B4-BE49-F238E27FC236}">
+                <a16:creationId xmlns:a16="http://schemas.microsoft.com/office/drawing/2014/main" id="{3046F48C-E603-9FA4-FA97-674E0ABE2BD7}"/>
+              </a:ext>
+            </a:extLst>
+          </p:cNvPr>
+          <p:cNvSpPr>
+            <a:spLocks noGrp="1" noRot="1" noChangeAspect="1"/>
+          </p:cNvSpPr>
+          <p:nvPr>
+            <p:ph type="sldImg"/>
+          </p:nvPr>
+        </p:nvSpPr>
+        <p:spPr/>
+      </p:sp>
+      <p:sp>
+        <p:nvSpPr>
+          <p:cNvPr id="3" name="ノート プレースホルダー 2">
+            <a:extLst>
+              <a:ext uri="{FF2B5EF4-FFF2-40B4-BE49-F238E27FC236}">
+                <a16:creationId xmlns:a16="http://schemas.microsoft.com/office/drawing/2014/main" id="{186629DD-7458-6B06-B39B-82F1A701C1DA}"/>
+              </a:ext>
+            </a:extLst>
+          </p:cNvPr>
+          <p:cNvSpPr>
+            <a:spLocks noGrp="1"/>
+          </p:cNvSpPr>
+          <p:nvPr>
+            <p:ph type="body" idx="1"/>
+          </p:nvPr>
+        </p:nvSpPr>
+        <p:spPr/>
+        <p:txBody>
+          <a:bodyPr/>
+          <a:lstStyle/>
+          <a:p>
+            <a:r>
+              <a:rPr kumimoji="1" lang="ja-JP" altLang="en-US" dirty="0"/>
+              <a:t>（あまりよく見れていなくて、かなりあいまい・・・）</a:t>
+            </a:r>
+            <a:endParaRPr kumimoji="1" lang="en-US" altLang="ja-JP" dirty="0"/>
+          </a:p>
+          <a:p>
+            <a:endParaRPr kumimoji="1" lang="en-US" altLang="ja-JP" dirty="0"/>
+          </a:p>
+          <a:p>
+            <a:r>
+              <a:rPr kumimoji="1" lang="en-US" altLang="ja-JP" dirty="0"/>
+              <a:t>ET</a:t>
+            </a:r>
+            <a:r>
+              <a:rPr kumimoji="1" lang="ja-JP" altLang="en-US" dirty="0"/>
+              <a:t>ロボコン主催者作成</a:t>
+            </a:r>
+            <a:endParaRPr kumimoji="1" lang="en-US" altLang="ja-JP" dirty="0"/>
+          </a:p>
+          <a:p>
+            <a:r>
+              <a:rPr kumimoji="1" lang="ja-JP" altLang="en-US" dirty="0"/>
+              <a:t>このプロジェクト自身は、自身のことを</a:t>
+            </a:r>
+            <a:r>
+              <a:rPr kumimoji="1" lang="en-US" altLang="ja-JP" dirty="0" err="1"/>
+              <a:t>RasPike</a:t>
+            </a:r>
+            <a:r>
+              <a:rPr kumimoji="1" lang="en-US" altLang="ja-JP" dirty="0"/>
+              <a:t>-ART</a:t>
+            </a:r>
+            <a:r>
+              <a:rPr kumimoji="1" lang="ja-JP" altLang="en-US" dirty="0"/>
+              <a:t>プロジェクトと名乗る。ややこしい。</a:t>
+            </a:r>
+            <a:endParaRPr kumimoji="1" lang="en-US" altLang="ja-JP" dirty="0"/>
+          </a:p>
+          <a:p>
+            <a:endParaRPr kumimoji="1" lang="en-US" altLang="ja-JP" dirty="0"/>
+          </a:p>
+          <a:p>
+            <a:r>
+              <a:rPr kumimoji="1" lang="ja-JP" altLang="en-US" dirty="0"/>
+              <a:t>目的は、</a:t>
+            </a:r>
+            <a:r>
+              <a:rPr kumimoji="1" lang="en-US" altLang="ja-JP" dirty="0"/>
+              <a:t>SPIKE</a:t>
+            </a:r>
+            <a:r>
+              <a:rPr kumimoji="1" lang="ja-JP" altLang="en-US" dirty="0"/>
+              <a:t>へ書き込むソフト、および</a:t>
+            </a:r>
+            <a:r>
+              <a:rPr kumimoji="1" lang="en-US" altLang="ja-JP" dirty="0"/>
+              <a:t>Raspberry PI</a:t>
+            </a:r>
+            <a:r>
+              <a:rPr kumimoji="1" lang="ja-JP" altLang="en-US" dirty="0"/>
+              <a:t>と</a:t>
+            </a:r>
+            <a:r>
+              <a:rPr kumimoji="1" lang="en-US" altLang="ja-JP" dirty="0"/>
+              <a:t>SPIKE</a:t>
+            </a:r>
+            <a:r>
+              <a:rPr kumimoji="1" lang="ja-JP" altLang="en-US" dirty="0"/>
+              <a:t>の間で通信するときのインターフェース。</a:t>
+            </a:r>
+            <a:endParaRPr kumimoji="1" lang="en-US" altLang="ja-JP" dirty="0"/>
+          </a:p>
+          <a:p>
+            <a:r>
+              <a:rPr kumimoji="1" lang="ja-JP" altLang="en-US" dirty="0"/>
+              <a:t>さらに、テストプログラムを含む。</a:t>
+            </a:r>
+            <a:r>
+              <a:rPr kumimoji="1" lang="en-US" altLang="ja-JP" dirty="0"/>
+              <a:t>Raspberry PI</a:t>
+            </a:r>
+            <a:r>
+              <a:rPr kumimoji="1" lang="ja-JP" altLang="en-US" dirty="0"/>
+              <a:t>側から実行して、</a:t>
+            </a:r>
+            <a:r>
+              <a:rPr kumimoji="1" lang="en-US" altLang="ja-JP" dirty="0"/>
+              <a:t>SPIKE</a:t>
+            </a:r>
+            <a:r>
+              <a:rPr kumimoji="1" lang="ja-JP" altLang="en-US" dirty="0"/>
+              <a:t>とのやり取りを保証するもの。</a:t>
+            </a:r>
+            <a:endParaRPr kumimoji="1" lang="en-US" altLang="ja-JP" dirty="0"/>
+          </a:p>
+          <a:p>
+            <a:endParaRPr kumimoji="1" lang="en-US" altLang="ja-JP" dirty="0"/>
+          </a:p>
+          <a:p>
+            <a:r>
+              <a:rPr kumimoji="1" lang="en-US" altLang="ja-JP" dirty="0"/>
+              <a:t>SPIKE-ART</a:t>
+            </a:r>
+            <a:r>
+              <a:rPr kumimoji="1" lang="ja-JP" altLang="en-US" dirty="0"/>
+              <a:t>から必要なモジュールだけコピーしている。</a:t>
+            </a:r>
+            <a:r>
+              <a:rPr kumimoji="1" lang="en-US" altLang="ja-JP" dirty="0"/>
+              <a:t>/</a:t>
+            </a:r>
+            <a:r>
+              <a:rPr kumimoji="1" lang="en-US" altLang="ja-JP" dirty="0" err="1"/>
+              <a:t>libraspike</a:t>
+            </a:r>
+            <a:r>
+              <a:rPr kumimoji="1" lang="en-US" altLang="ja-JP" dirty="0"/>
+              <a:t>-art/drivers</a:t>
+            </a:r>
+            <a:r>
+              <a:rPr kumimoji="1" lang="ja-JP" altLang="en-US" dirty="0"/>
+              <a:t>配下</a:t>
+            </a:r>
+            <a:endParaRPr kumimoji="1" lang="en-US" altLang="ja-JP" dirty="0"/>
+          </a:p>
+          <a:p>
+            <a:r>
+              <a:rPr kumimoji="1" lang="en-US" altLang="ja-JP" dirty="0"/>
+              <a:t>TOPPERS/ASP3</a:t>
+            </a:r>
+            <a:r>
+              <a:rPr kumimoji="1" lang="ja-JP" altLang="en-US" dirty="0"/>
+              <a:t>との接続は切れてしまっている。</a:t>
+            </a:r>
+            <a:endParaRPr kumimoji="1" lang="en-US" altLang="ja-JP" dirty="0"/>
+          </a:p>
+          <a:p>
+            <a:endParaRPr kumimoji="1" lang="en-US" altLang="ja-JP" dirty="0"/>
+          </a:p>
+          <a:p>
+            <a:r>
+              <a:rPr kumimoji="1" lang="en-US" altLang="ja-JP" dirty="0"/>
+              <a:t>https://github.com/ETrobocon/libraspike-art</a:t>
+            </a:r>
+            <a:endParaRPr kumimoji="1" lang="ja-JP" altLang="en-US" dirty="0"/>
+          </a:p>
+        </p:txBody>
+      </p:sp>
+      <p:sp>
+        <p:nvSpPr>
+          <p:cNvPr id="4" name="スライド番号プレースホルダー 3">
+            <a:extLst>
+              <a:ext uri="{FF2B5EF4-FFF2-40B4-BE49-F238E27FC236}">
+                <a16:creationId xmlns:a16="http://schemas.microsoft.com/office/drawing/2014/main" id="{B6F88B52-C0C5-B492-0A5D-417CE45959F7}"/>
+              </a:ext>
+            </a:extLst>
+          </p:cNvPr>
+          <p:cNvSpPr>
+            <a:spLocks noGrp="1"/>
+          </p:cNvSpPr>
+          <p:nvPr>
+            <p:ph type="sldNum" sz="quarter" idx="5"/>
+          </p:nvPr>
+        </p:nvSpPr>
+        <p:spPr/>
+        <p:txBody>
+          <a:bodyPr/>
+          <a:lstStyle/>
+          <a:p>
+            <a:fld id="{816B5BE4-11DE-4F26-9BFB-79944BBF670C}" type="slidenum">
+              <a:rPr kumimoji="1" lang="ja-JP" altLang="en-US" smtClean="0"/>
+              <a:t>6</a:t>
+            </a:fld>
+            <a:endParaRPr kumimoji="1" lang="ja-JP" altLang="en-US"/>
+          </a:p>
+        </p:txBody>
+      </p:sp>
+    </p:spTree>
+    <p:extLst>
+      <p:ext uri="{BB962C8B-B14F-4D97-AF65-F5344CB8AC3E}">
+        <p14:creationId xmlns:p14="http://schemas.microsoft.com/office/powerpoint/2010/main" val="887059721"/>
+      </p:ext>
+    </p:extLst>
+  </p:cSld>
+  <p:clrMapOvr>
+    <a:masterClrMapping/>
+  </p:clrMapOvr>
+</p:notes>
+</file>
+
+<file path=ppt/notesSlides/notesSlide4.xml><?xml version="1.0" encoding="utf-8"?>
+<p:notes xmlns:a="http://schemas.openxmlformats.org/drawingml/2006/main" xmlns:r="http://schemas.openxmlformats.org/officeDocument/2006/relationships" xmlns:p="http://schemas.openxmlformats.org/presentationml/2006/main">
+  <p:cSld>
+    <p:spTree>
+      <p:nvGrpSpPr>
+        <p:cNvPr id="1" name="">
+          <a:extLst>
+            <a:ext uri="{FF2B5EF4-FFF2-40B4-BE49-F238E27FC236}">
+              <a16:creationId xmlns:a16="http://schemas.microsoft.com/office/drawing/2014/main" id="{A6568E77-CF61-BFAD-C08D-9F1CD090ED4B}"/>
+            </a:ext>
+          </a:extLst>
+        </p:cNvPr>
+        <p:cNvGrpSpPr/>
+        <p:nvPr/>
+      </p:nvGrpSpPr>
+      <p:grpSpPr>
+        <a:xfrm>
+          <a:off x="0" y="0"/>
+          <a:ext cx="0" cy="0"/>
+          <a:chOff x="0" y="0"/>
+          <a:chExt cx="0" cy="0"/>
+        </a:xfrm>
+      </p:grpSpPr>
+      <p:sp>
+        <p:nvSpPr>
+          <p:cNvPr id="2" name="スライド イメージ プレースホルダー 1">
+            <a:extLst>
+              <a:ext uri="{FF2B5EF4-FFF2-40B4-BE49-F238E27FC236}">
+                <a16:creationId xmlns:a16="http://schemas.microsoft.com/office/drawing/2014/main" id="{6C284BDB-C6AB-B84B-CE08-DEBA21959977}"/>
+              </a:ext>
+            </a:extLst>
+          </p:cNvPr>
+          <p:cNvSpPr>
+            <a:spLocks noGrp="1" noRot="1" noChangeAspect="1"/>
+          </p:cNvSpPr>
+          <p:nvPr>
+            <p:ph type="sldImg"/>
+          </p:nvPr>
+        </p:nvSpPr>
+        <p:spPr/>
+      </p:sp>
+      <p:sp>
+        <p:nvSpPr>
+          <p:cNvPr id="3" name="ノート プレースホルダー 2">
+            <a:extLst>
+              <a:ext uri="{FF2B5EF4-FFF2-40B4-BE49-F238E27FC236}">
+                <a16:creationId xmlns:a16="http://schemas.microsoft.com/office/drawing/2014/main" id="{7112BEB3-4AAA-56DD-DFC9-F73B52339521}"/>
+              </a:ext>
+            </a:extLst>
+          </p:cNvPr>
+          <p:cNvSpPr>
+            <a:spLocks noGrp="1"/>
+          </p:cNvSpPr>
+          <p:nvPr>
+            <p:ph type="body" idx="1"/>
+          </p:nvPr>
+        </p:nvSpPr>
+        <p:spPr/>
+        <p:txBody>
+          <a:bodyPr/>
+          <a:lstStyle/>
+          <a:p>
+            <a:pPr marL="0" marR="0" lvl="0" indent="0" algn="l" defTabSz="914400" rtl="0" eaLnBrk="1" fontAlgn="auto" latinLnBrk="0" hangingPunct="1">
+              <a:lnSpc>
+                <a:spcPct val="100000"/>
+              </a:lnSpc>
+              <a:spcBef>
+                <a:spcPts val="0"/>
+              </a:spcBef>
+              <a:spcAft>
+                <a:spcPts val="0"/>
+              </a:spcAft>
+              <a:buClrTx/>
+              <a:buSzTx/>
+              <a:buFontTx/>
+              <a:buNone/>
+              <a:tabLst/>
+              <a:defRPr/>
+            </a:pPr>
+            <a:r>
+              <a:rPr kumimoji="1" lang="en-US" altLang="ja-JP" dirty="0"/>
+              <a:t>ET</a:t>
+            </a:r>
+            <a:r>
+              <a:rPr kumimoji="1" lang="ja-JP" altLang="en-US" dirty="0"/>
+              <a:t>ロボコン主催者作成</a:t>
+            </a:r>
+            <a:endParaRPr kumimoji="1" lang="en-US" altLang="ja-JP" dirty="0"/>
+          </a:p>
+          <a:p>
+            <a:endParaRPr kumimoji="1" lang="en-US" altLang="ja-JP" dirty="0"/>
+          </a:p>
+          <a:p>
+            <a:r>
+              <a:rPr kumimoji="1" lang="ja-JP" altLang="en-US" dirty="0"/>
+              <a:t>目的は、</a:t>
+            </a:r>
+            <a:r>
+              <a:rPr kumimoji="1" lang="en-US" altLang="ja-JP" dirty="0" err="1"/>
+              <a:t>RasPI</a:t>
+            </a:r>
+            <a:r>
+              <a:rPr kumimoji="1" lang="ja-JP" altLang="en-US" dirty="0"/>
+              <a:t>側のソフト。</a:t>
+            </a:r>
+            <a:endParaRPr kumimoji="1" lang="en-US" altLang="ja-JP" dirty="0"/>
+          </a:p>
+          <a:p>
+            <a:r>
+              <a:rPr kumimoji="1" lang="ja-JP" altLang="en-US" dirty="0"/>
+              <a:t>この際</a:t>
+            </a:r>
+            <a:r>
+              <a:rPr kumimoji="1" lang="en-US" altLang="ja-JP" dirty="0"/>
+              <a:t>TOPPERS/ASP3</a:t>
+            </a:r>
+            <a:r>
+              <a:rPr kumimoji="1" lang="ja-JP" altLang="en-US" dirty="0"/>
+              <a:t>に依存し、</a:t>
+            </a:r>
+            <a:r>
+              <a:rPr kumimoji="1" lang="en-US" altLang="ja-JP" dirty="0"/>
+              <a:t>Linux</a:t>
+            </a:r>
+            <a:r>
+              <a:rPr kumimoji="1" lang="ja-JP" altLang="en-US" dirty="0"/>
+              <a:t>上にエミュレータを設立し、その上に</a:t>
+            </a:r>
+            <a:r>
+              <a:rPr kumimoji="1" lang="en-US" altLang="ja-JP" dirty="0"/>
+              <a:t>RTOS</a:t>
+            </a:r>
+            <a:r>
+              <a:rPr kumimoji="1" lang="ja-JP" altLang="en-US" dirty="0"/>
+              <a:t>を起動する。</a:t>
+            </a:r>
+            <a:endParaRPr kumimoji="1" lang="en-US" altLang="ja-JP" dirty="0"/>
+          </a:p>
+          <a:p>
+            <a:endParaRPr kumimoji="1" lang="en-US" altLang="ja-JP" dirty="0"/>
+          </a:p>
+          <a:p>
+            <a:r>
+              <a:rPr kumimoji="1" lang="en-US" altLang="ja-JP" dirty="0"/>
+              <a:t>https://github.com/ETrobocon/RasPike-ART?tab=readme-ov-file</a:t>
+            </a:r>
+            <a:endParaRPr kumimoji="1" lang="ja-JP" altLang="en-US" dirty="0"/>
+          </a:p>
+        </p:txBody>
+      </p:sp>
+      <p:sp>
+        <p:nvSpPr>
+          <p:cNvPr id="4" name="スライド番号プレースホルダー 3">
+            <a:extLst>
+              <a:ext uri="{FF2B5EF4-FFF2-40B4-BE49-F238E27FC236}">
+                <a16:creationId xmlns:a16="http://schemas.microsoft.com/office/drawing/2014/main" id="{D202F3B0-4CE7-A7B9-55DD-79B0729CFAA5}"/>
+              </a:ext>
+            </a:extLst>
+          </p:cNvPr>
+          <p:cNvSpPr>
+            <a:spLocks noGrp="1"/>
+          </p:cNvSpPr>
+          <p:nvPr>
+            <p:ph type="sldNum" sz="quarter" idx="5"/>
+          </p:nvPr>
+        </p:nvSpPr>
+        <p:spPr/>
+        <p:txBody>
+          <a:bodyPr/>
+          <a:lstStyle/>
+          <a:p>
+            <a:fld id="{816B5BE4-11DE-4F26-9BFB-79944BBF670C}" type="slidenum">
+              <a:rPr kumimoji="1" lang="ja-JP" altLang="en-US" smtClean="0"/>
+              <a:t>7</a:t>
+            </a:fld>
+            <a:endParaRPr kumimoji="1" lang="ja-JP" altLang="en-US"/>
+          </a:p>
+        </p:txBody>
+      </p:sp>
+    </p:spTree>
+    <p:extLst>
+      <p:ext uri="{BB962C8B-B14F-4D97-AF65-F5344CB8AC3E}">
+        <p14:creationId xmlns:p14="http://schemas.microsoft.com/office/powerpoint/2010/main" val="2809234909"/>
+      </p:ext>
+    </p:extLst>
+  </p:cSld>
+  <p:clrMapOvr>
+    <a:masterClrMapping/>
+  </p:clrMapOvr>
+</p:notes>
+</file>
+
+<file path=ppt/notesSlides/notesSlide5.xml><?xml version="1.0" encoding="utf-8"?>
+<p:notes xmlns:a="http://schemas.openxmlformats.org/drawingml/2006/main" xmlns:r="http://schemas.openxmlformats.org/officeDocument/2006/relationships" xmlns:p="http://schemas.openxmlformats.org/presentationml/2006/main">
+  <p:cSld>
+    <p:spTree>
+      <p:nvGrpSpPr>
+        <p:cNvPr id="1" name="">
+          <a:extLst>
+            <a:ext uri="{FF2B5EF4-FFF2-40B4-BE49-F238E27FC236}">
+              <a16:creationId xmlns:a16="http://schemas.microsoft.com/office/drawing/2014/main" id="{91D47328-8D3B-F33B-739A-4A855C33BBC5}"/>
+            </a:ext>
+          </a:extLst>
+        </p:cNvPr>
+        <p:cNvGrpSpPr/>
+        <p:nvPr/>
+      </p:nvGrpSpPr>
+      <p:grpSpPr>
+        <a:xfrm>
+          <a:off x="0" y="0"/>
+          <a:ext cx="0" cy="0"/>
+          <a:chOff x="0" y="0"/>
+          <a:chExt cx="0" cy="0"/>
+        </a:xfrm>
+      </p:grpSpPr>
+      <p:sp>
+        <p:nvSpPr>
+          <p:cNvPr id="2" name="スライド イメージ プレースホルダー 1">
+            <a:extLst>
+              <a:ext uri="{FF2B5EF4-FFF2-40B4-BE49-F238E27FC236}">
+                <a16:creationId xmlns:a16="http://schemas.microsoft.com/office/drawing/2014/main" id="{BB692D58-B251-E3ED-A0A3-793FCEEEC1B4}"/>
+              </a:ext>
+            </a:extLst>
+          </p:cNvPr>
+          <p:cNvSpPr>
+            <a:spLocks noGrp="1" noRot="1" noChangeAspect="1"/>
+          </p:cNvSpPr>
+          <p:nvPr>
+            <p:ph type="sldImg"/>
+          </p:nvPr>
+        </p:nvSpPr>
+        <p:spPr/>
+      </p:sp>
+      <p:sp>
+        <p:nvSpPr>
+          <p:cNvPr id="3" name="ノート プレースホルダー 2">
+            <a:extLst>
+              <a:ext uri="{FF2B5EF4-FFF2-40B4-BE49-F238E27FC236}">
+                <a16:creationId xmlns:a16="http://schemas.microsoft.com/office/drawing/2014/main" id="{467B6D15-A6FA-7B4A-FB7B-FB0B86FCE0EB}"/>
+              </a:ext>
+            </a:extLst>
+          </p:cNvPr>
+          <p:cNvSpPr>
+            <a:spLocks noGrp="1"/>
+          </p:cNvSpPr>
+          <p:nvPr>
+            <p:ph type="body" idx="1"/>
+          </p:nvPr>
+        </p:nvSpPr>
+        <p:spPr/>
+        <p:txBody>
+          <a:bodyPr/>
+          <a:lstStyle/>
+          <a:p>
+            <a:pPr marL="0" marR="0" lvl="0" indent="0" algn="l" defTabSz="914400" rtl="0" eaLnBrk="1" fontAlgn="auto" latinLnBrk="0" hangingPunct="1">
+              <a:lnSpc>
+                <a:spcPct val="100000"/>
+              </a:lnSpc>
+              <a:spcBef>
+                <a:spcPts val="0"/>
+              </a:spcBef>
+              <a:spcAft>
+                <a:spcPts val="0"/>
+              </a:spcAft>
+              <a:buClrTx/>
+              <a:buSzTx/>
+              <a:buFontTx/>
+              <a:buNone/>
+              <a:tabLst/>
+              <a:defRPr/>
+            </a:pPr>
+            <a:r>
+              <a:rPr kumimoji="1" lang="ja-JP" altLang="en-US" dirty="0"/>
+              <a:t>システナ松山イノベーションラボが作成</a:t>
+            </a:r>
+            <a:endParaRPr kumimoji="1" lang="en-US" altLang="ja-JP" dirty="0"/>
+          </a:p>
+          <a:p>
+            <a:pPr marL="0" marR="0" lvl="0" indent="0" algn="l" defTabSz="914400" rtl="0" eaLnBrk="1" fontAlgn="auto" latinLnBrk="0" hangingPunct="1">
+              <a:lnSpc>
+                <a:spcPct val="100000"/>
+              </a:lnSpc>
+              <a:spcBef>
+                <a:spcPts val="0"/>
+              </a:spcBef>
+              <a:spcAft>
+                <a:spcPts val="0"/>
+              </a:spcAft>
+              <a:buClrTx/>
+              <a:buSzTx/>
+              <a:buFontTx/>
+              <a:buNone/>
+              <a:tabLst/>
+              <a:defRPr/>
+            </a:pPr>
+            <a:r>
+              <a:rPr kumimoji="1" lang="en-US" altLang="ja-JP" dirty="0" err="1"/>
+              <a:t>RasPike</a:t>
+            </a:r>
+            <a:r>
+              <a:rPr kumimoji="1" lang="en-US" altLang="ja-JP" dirty="0"/>
+              <a:t>-ART</a:t>
+            </a:r>
+            <a:r>
+              <a:rPr kumimoji="1" lang="ja-JP" altLang="en-US" dirty="0"/>
+              <a:t>の提供する</a:t>
+            </a:r>
+            <a:r>
+              <a:rPr kumimoji="1" lang="en-US" altLang="ja-JP" dirty="0" err="1"/>
+              <a:t>RasPI</a:t>
+            </a:r>
+            <a:r>
+              <a:rPr kumimoji="1" lang="ja-JP" altLang="en-US" dirty="0"/>
+              <a:t>ソフト開発環境を利用して、競技内容に即した運転を記述する。</a:t>
+            </a:r>
+            <a:endParaRPr kumimoji="1" lang="en-US" altLang="ja-JP" dirty="0"/>
+          </a:p>
+          <a:p>
+            <a:pPr marL="0" marR="0" lvl="0" indent="0" algn="l" defTabSz="914400" rtl="0" eaLnBrk="1" fontAlgn="auto" latinLnBrk="0" hangingPunct="1">
+              <a:lnSpc>
+                <a:spcPct val="100000"/>
+              </a:lnSpc>
+              <a:spcBef>
+                <a:spcPts val="0"/>
+              </a:spcBef>
+              <a:spcAft>
+                <a:spcPts val="0"/>
+              </a:spcAft>
+              <a:buClrTx/>
+              <a:buSzTx/>
+              <a:buFontTx/>
+              <a:buNone/>
+              <a:tabLst/>
+              <a:defRPr/>
+            </a:pPr>
+            <a:endParaRPr kumimoji="1" lang="en-US" altLang="ja-JP" dirty="0"/>
+          </a:p>
+          <a:p>
+            <a:pPr marL="0" marR="0" lvl="0" indent="0" algn="l" defTabSz="914400" rtl="0" eaLnBrk="1" fontAlgn="auto" latinLnBrk="0" hangingPunct="1">
+              <a:lnSpc>
+                <a:spcPct val="100000"/>
+              </a:lnSpc>
+              <a:spcBef>
+                <a:spcPts val="0"/>
+              </a:spcBef>
+              <a:spcAft>
+                <a:spcPts val="0"/>
+              </a:spcAft>
+              <a:buClrTx/>
+              <a:buSzTx/>
+              <a:buFontTx/>
+              <a:buNone/>
+              <a:tabLst/>
+              <a:defRPr/>
+            </a:pPr>
+            <a:r>
+              <a:rPr kumimoji="1" lang="en-US" altLang="ja-JP"/>
+              <a:t>https://github.com/miyoshiyuu-systena/tenarobo-primary-mil-2025</a:t>
+            </a:r>
+            <a:endParaRPr kumimoji="1" lang="ja-JP" altLang="en-US" dirty="0"/>
+          </a:p>
+        </p:txBody>
+      </p:sp>
+      <p:sp>
+        <p:nvSpPr>
+          <p:cNvPr id="4" name="スライド番号プレースホルダー 3">
+            <a:extLst>
+              <a:ext uri="{FF2B5EF4-FFF2-40B4-BE49-F238E27FC236}">
+                <a16:creationId xmlns:a16="http://schemas.microsoft.com/office/drawing/2014/main" id="{36F9058E-F79C-E0A3-8DA2-DCE596481E26}"/>
+              </a:ext>
+            </a:extLst>
+          </p:cNvPr>
+          <p:cNvSpPr>
+            <a:spLocks noGrp="1"/>
+          </p:cNvSpPr>
+          <p:nvPr>
+            <p:ph type="sldNum" sz="quarter" idx="5"/>
+          </p:nvPr>
+        </p:nvSpPr>
+        <p:spPr/>
+        <p:txBody>
+          <a:bodyPr/>
+          <a:lstStyle/>
+          <a:p>
+            <a:fld id="{816B5BE4-11DE-4F26-9BFB-79944BBF670C}" type="slidenum">
+              <a:rPr kumimoji="1" lang="ja-JP" altLang="en-US" smtClean="0"/>
+              <a:t>8</a:t>
+            </a:fld>
+            <a:endParaRPr kumimoji="1" lang="ja-JP" altLang="en-US"/>
+          </a:p>
+        </p:txBody>
+      </p:sp>
+    </p:spTree>
+    <p:extLst>
+      <p:ext uri="{BB962C8B-B14F-4D97-AF65-F5344CB8AC3E}">
+        <p14:creationId xmlns:p14="http://schemas.microsoft.com/office/powerpoint/2010/main" val="2040369131"/>
+      </p:ext>
+    </p:extLst>
+  </p:cSld>
+  <p:clrMapOvr>
+    <a:masterClrMapping/>
+  </p:clrMapOvr>
+</p:notes>
 </file>
 
 <file path=ppt/slideLayouts/slideLayout1.xml><?xml version="1.0" encoding="utf-8"?>
@@ -4863,6 +6255,1834 @@
 </p:sld>
 </file>
 
+<file path=ppt/slides/slide3.xml><?xml version="1.0" encoding="utf-8"?>
+<p:sld xmlns:a="http://schemas.openxmlformats.org/drawingml/2006/main" xmlns:r="http://schemas.openxmlformats.org/officeDocument/2006/relationships" xmlns:p="http://schemas.openxmlformats.org/presentationml/2006/main">
+  <p:cSld>
+    <p:spTree>
+      <p:nvGrpSpPr>
+        <p:cNvPr id="1" name=""/>
+        <p:cNvGrpSpPr/>
+        <p:nvPr/>
+      </p:nvGrpSpPr>
+      <p:grpSpPr>
+        <a:xfrm>
+          <a:off x="0" y="0"/>
+          <a:ext cx="0" cy="0"/>
+          <a:chOff x="0" y="0"/>
+          <a:chExt cx="0" cy="0"/>
+        </a:xfrm>
+      </p:grpSpPr>
+      <p:sp>
+        <p:nvSpPr>
+          <p:cNvPr id="5" name="テキスト ボックス 4">
+            <a:extLst>
+              <a:ext uri="{FF2B5EF4-FFF2-40B4-BE49-F238E27FC236}">
+                <a16:creationId xmlns:a16="http://schemas.microsoft.com/office/drawing/2014/main" id="{881E123A-499D-DC9F-C444-85C575640F8E}"/>
+              </a:ext>
+            </a:extLst>
+          </p:cNvPr>
+          <p:cNvSpPr txBox="1"/>
+          <p:nvPr/>
+        </p:nvSpPr>
+        <p:spPr>
+          <a:xfrm>
+            <a:off x="986589" y="1018672"/>
+            <a:ext cx="6340197" cy="584775"/>
+          </a:xfrm>
+          <a:prstGeom prst="rect">
+            <a:avLst/>
+          </a:prstGeom>
+          <a:noFill/>
+        </p:spPr>
+        <p:txBody>
+          <a:bodyPr wrap="none" rtlCol="0">
+            <a:spAutoFit/>
+          </a:bodyPr>
+          <a:lstStyle/>
+          <a:p>
+            <a:r>
+              <a:rPr lang="ja-JP" altLang="en-US" sz="3200" dirty="0">
+                <a:latin typeface="メイリオ" panose="020B0604030504040204" pitchFamily="50" charset="-128"/>
+                <a:ea typeface="メイリオ" panose="020B0604030504040204" pitchFamily="50" charset="-128"/>
+              </a:rPr>
+              <a:t>ここからモジュール全体像・展開</a:t>
+            </a:r>
+            <a:endParaRPr kumimoji="1" lang="ja-JP" altLang="en-US" sz="3200" dirty="0">
+              <a:latin typeface="メイリオ" panose="020B0604030504040204" pitchFamily="50" charset="-128"/>
+              <a:ea typeface="メイリオ" panose="020B0604030504040204" pitchFamily="50" charset="-128"/>
+            </a:endParaRPr>
+          </a:p>
+        </p:txBody>
+      </p:sp>
+    </p:spTree>
+    <p:extLst>
+      <p:ext uri="{BB962C8B-B14F-4D97-AF65-F5344CB8AC3E}">
+        <p14:creationId xmlns:p14="http://schemas.microsoft.com/office/powerpoint/2010/main" val="407373588"/>
+      </p:ext>
+    </p:extLst>
+  </p:cSld>
+  <p:clrMapOvr>
+    <a:masterClrMapping/>
+  </p:clrMapOvr>
+</p:sld>
+</file>
+
+<file path=ppt/slides/slide4.xml><?xml version="1.0" encoding="utf-8"?>
+<p:sld xmlns:a="http://schemas.openxmlformats.org/drawingml/2006/main" xmlns:r="http://schemas.openxmlformats.org/officeDocument/2006/relationships" xmlns:p="http://schemas.openxmlformats.org/presentationml/2006/main">
+  <p:cSld>
+    <p:spTree>
+      <p:nvGrpSpPr>
+        <p:cNvPr id="1" name="">
+          <a:extLst>
+            <a:ext uri="{FF2B5EF4-FFF2-40B4-BE49-F238E27FC236}">
+              <a16:creationId xmlns:a16="http://schemas.microsoft.com/office/drawing/2014/main" id="{EB8D914B-5AC1-74CF-C50E-9CA377438368}"/>
+            </a:ext>
+          </a:extLst>
+        </p:cNvPr>
+        <p:cNvGrpSpPr/>
+        <p:nvPr/>
+      </p:nvGrpSpPr>
+      <p:grpSpPr>
+        <a:xfrm>
+          <a:off x="0" y="0"/>
+          <a:ext cx="0" cy="0"/>
+          <a:chOff x="0" y="0"/>
+          <a:chExt cx="0" cy="0"/>
+        </a:xfrm>
+      </p:grpSpPr>
+      <p:sp>
+        <p:nvSpPr>
+          <p:cNvPr id="4" name="正方形/長方形 3">
+            <a:extLst>
+              <a:ext uri="{FF2B5EF4-FFF2-40B4-BE49-F238E27FC236}">
+                <a16:creationId xmlns:a16="http://schemas.microsoft.com/office/drawing/2014/main" id="{69B72D17-BE2F-579D-1107-12094E0A6A44}"/>
+              </a:ext>
+            </a:extLst>
+          </p:cNvPr>
+          <p:cNvSpPr/>
+          <p:nvPr/>
+        </p:nvSpPr>
+        <p:spPr>
+          <a:xfrm>
+            <a:off x="8438147" y="4358777"/>
+            <a:ext cx="1440000" cy="1440000"/>
+          </a:xfrm>
+          <a:prstGeom prst="rect">
+            <a:avLst/>
+          </a:prstGeom>
+          <a:solidFill>
+            <a:schemeClr val="tx1">
+              <a:lumMod val="75000"/>
+              <a:lumOff val="25000"/>
+            </a:schemeClr>
+          </a:solidFill>
+          <a:ln>
+            <a:noFill/>
+          </a:ln>
+        </p:spPr>
+        <p:style>
+          <a:lnRef idx="2">
+            <a:schemeClr val="accent1">
+              <a:shade val="15000"/>
+            </a:schemeClr>
+          </a:lnRef>
+          <a:fillRef idx="1">
+            <a:schemeClr val="accent1"/>
+          </a:fillRef>
+          <a:effectRef idx="0">
+            <a:schemeClr val="accent1"/>
+          </a:effectRef>
+          <a:fontRef idx="minor">
+            <a:schemeClr val="lt1"/>
+          </a:fontRef>
+        </p:style>
+        <p:txBody>
+          <a:bodyPr rtlCol="0" anchor="ctr"/>
+          <a:lstStyle/>
+          <a:p>
+            <a:pPr algn="ctr"/>
+            <a:r>
+              <a:rPr kumimoji="1" lang="en-US" altLang="ja-JP" dirty="0">
+                <a:solidFill>
+                  <a:schemeClr val="bg1"/>
+                </a:solidFill>
+                <a:latin typeface="メイリオ" panose="020B0604030504040204" pitchFamily="50" charset="-128"/>
+                <a:ea typeface="メイリオ" panose="020B0604030504040204" pitchFamily="50" charset="-128"/>
+              </a:rPr>
+              <a:t>TOPPERS / ASP3</a:t>
+            </a:r>
+          </a:p>
+        </p:txBody>
+      </p:sp>
+    </p:spTree>
+    <p:extLst>
+      <p:ext uri="{BB962C8B-B14F-4D97-AF65-F5344CB8AC3E}">
+        <p14:creationId xmlns:p14="http://schemas.microsoft.com/office/powerpoint/2010/main" val="2248181833"/>
+      </p:ext>
+    </p:extLst>
+  </p:cSld>
+  <p:clrMapOvr>
+    <a:masterClrMapping/>
+  </p:clrMapOvr>
+</p:sld>
+</file>
+
+<file path=ppt/slides/slide5.xml><?xml version="1.0" encoding="utf-8"?>
+<p:sld xmlns:a="http://schemas.openxmlformats.org/drawingml/2006/main" xmlns:r="http://schemas.openxmlformats.org/officeDocument/2006/relationships" xmlns:p="http://schemas.openxmlformats.org/presentationml/2006/main">
+  <p:cSld>
+    <p:spTree>
+      <p:nvGrpSpPr>
+        <p:cNvPr id="1" name="">
+          <a:extLst>
+            <a:ext uri="{FF2B5EF4-FFF2-40B4-BE49-F238E27FC236}">
+              <a16:creationId xmlns:a16="http://schemas.microsoft.com/office/drawing/2014/main" id="{5E76360E-16C5-BBAC-DA14-D9395968DF4C}"/>
+            </a:ext>
+          </a:extLst>
+        </p:cNvPr>
+        <p:cNvGrpSpPr/>
+        <p:nvPr/>
+      </p:nvGrpSpPr>
+      <p:grpSpPr>
+        <a:xfrm>
+          <a:off x="0" y="0"/>
+          <a:ext cx="0" cy="0"/>
+          <a:chOff x="0" y="0"/>
+          <a:chExt cx="0" cy="0"/>
+        </a:xfrm>
+      </p:grpSpPr>
+      <p:sp>
+        <p:nvSpPr>
+          <p:cNvPr id="4" name="正方形/長方形 3">
+            <a:extLst>
+              <a:ext uri="{FF2B5EF4-FFF2-40B4-BE49-F238E27FC236}">
+                <a16:creationId xmlns:a16="http://schemas.microsoft.com/office/drawing/2014/main" id="{7D968B50-BBCC-492D-AFB4-9EAA8C54FD9D}"/>
+              </a:ext>
+            </a:extLst>
+          </p:cNvPr>
+          <p:cNvSpPr/>
+          <p:nvPr/>
+        </p:nvSpPr>
+        <p:spPr>
+          <a:xfrm>
+            <a:off x="8438147" y="1395443"/>
+            <a:ext cx="1440000" cy="1440000"/>
+          </a:xfrm>
+          <a:prstGeom prst="rect">
+            <a:avLst/>
+          </a:prstGeom>
+          <a:solidFill>
+            <a:schemeClr val="tx1">
+              <a:lumMod val="75000"/>
+              <a:lumOff val="25000"/>
+            </a:schemeClr>
+          </a:solidFill>
+          <a:ln>
+            <a:noFill/>
+          </a:ln>
+        </p:spPr>
+        <p:style>
+          <a:lnRef idx="2">
+            <a:schemeClr val="accent1">
+              <a:shade val="15000"/>
+            </a:schemeClr>
+          </a:lnRef>
+          <a:fillRef idx="1">
+            <a:schemeClr val="accent1"/>
+          </a:fillRef>
+          <a:effectRef idx="0">
+            <a:schemeClr val="accent1"/>
+          </a:effectRef>
+          <a:fontRef idx="minor">
+            <a:schemeClr val="lt1"/>
+          </a:fontRef>
+        </p:style>
+        <p:txBody>
+          <a:bodyPr rtlCol="0" anchor="ctr"/>
+          <a:lstStyle/>
+          <a:p>
+            <a:pPr algn="ctr"/>
+            <a:r>
+              <a:rPr kumimoji="1" lang="en-US" altLang="ja-JP" dirty="0">
+                <a:solidFill>
+                  <a:schemeClr val="bg1"/>
+                </a:solidFill>
+                <a:latin typeface="メイリオ" panose="020B0604030504040204" pitchFamily="50" charset="-128"/>
+                <a:ea typeface="メイリオ" panose="020B0604030504040204" pitchFamily="50" charset="-128"/>
+              </a:rPr>
+              <a:t>Spike-ART</a:t>
+            </a:r>
+          </a:p>
+        </p:txBody>
+      </p:sp>
+      <p:sp>
+        <p:nvSpPr>
+          <p:cNvPr id="2" name="正方形/長方形 1">
+            <a:extLst>
+              <a:ext uri="{FF2B5EF4-FFF2-40B4-BE49-F238E27FC236}">
+                <a16:creationId xmlns:a16="http://schemas.microsoft.com/office/drawing/2014/main" id="{20B5EC4F-9119-E7EE-6841-44339B836A9E}"/>
+              </a:ext>
+            </a:extLst>
+          </p:cNvPr>
+          <p:cNvSpPr/>
+          <p:nvPr/>
+        </p:nvSpPr>
+        <p:spPr>
+          <a:xfrm>
+            <a:off x="8438147" y="4358777"/>
+            <a:ext cx="1440000" cy="1440000"/>
+          </a:xfrm>
+          <a:prstGeom prst="rect">
+            <a:avLst/>
+          </a:prstGeom>
+          <a:solidFill>
+            <a:schemeClr val="tx1">
+              <a:lumMod val="75000"/>
+              <a:lumOff val="25000"/>
+            </a:schemeClr>
+          </a:solidFill>
+          <a:ln>
+            <a:noFill/>
+          </a:ln>
+        </p:spPr>
+        <p:style>
+          <a:lnRef idx="2">
+            <a:schemeClr val="accent1">
+              <a:shade val="15000"/>
+            </a:schemeClr>
+          </a:lnRef>
+          <a:fillRef idx="1">
+            <a:schemeClr val="accent1"/>
+          </a:fillRef>
+          <a:effectRef idx="0">
+            <a:schemeClr val="accent1"/>
+          </a:effectRef>
+          <a:fontRef idx="minor">
+            <a:schemeClr val="lt1"/>
+          </a:fontRef>
+        </p:style>
+        <p:txBody>
+          <a:bodyPr rtlCol="0" anchor="ctr"/>
+          <a:lstStyle/>
+          <a:p>
+            <a:pPr algn="ctr"/>
+            <a:r>
+              <a:rPr kumimoji="1" lang="en-US" altLang="ja-JP" dirty="0">
+                <a:solidFill>
+                  <a:schemeClr val="bg1"/>
+                </a:solidFill>
+                <a:latin typeface="メイリオ" panose="020B0604030504040204" pitchFamily="50" charset="-128"/>
+                <a:ea typeface="メイリオ" panose="020B0604030504040204" pitchFamily="50" charset="-128"/>
+              </a:rPr>
+              <a:t>TOPPERS / ASP3</a:t>
+            </a:r>
+          </a:p>
+        </p:txBody>
+      </p:sp>
+      <p:cxnSp>
+        <p:nvCxnSpPr>
+          <p:cNvPr id="3" name="直線矢印コネクタ 2">
+            <a:extLst>
+              <a:ext uri="{FF2B5EF4-FFF2-40B4-BE49-F238E27FC236}">
+                <a16:creationId xmlns:a16="http://schemas.microsoft.com/office/drawing/2014/main" id="{BE0D5522-BE32-B77C-68C3-B62E2426D639}"/>
+              </a:ext>
+            </a:extLst>
+          </p:cNvPr>
+          <p:cNvCxnSpPr>
+            <a:cxnSpLocks/>
+            <a:stCxn id="4" idx="2"/>
+            <a:endCxn id="2" idx="0"/>
+          </p:cNvCxnSpPr>
+          <p:nvPr/>
+        </p:nvCxnSpPr>
+        <p:spPr>
+          <a:xfrm>
+            <a:off x="9158147" y="2835443"/>
+            <a:ext cx="0" cy="1523334"/>
+          </a:xfrm>
+          <a:prstGeom prst="straightConnector1">
+            <a:avLst/>
+          </a:prstGeom>
+          <a:ln w="28575">
+            <a:solidFill>
+              <a:schemeClr val="tx1">
+                <a:lumMod val="50000"/>
+                <a:lumOff val="50000"/>
+              </a:schemeClr>
+            </a:solidFill>
+            <a:tailEnd type="triangle"/>
+          </a:ln>
+        </p:spPr>
+        <p:style>
+          <a:lnRef idx="1">
+            <a:schemeClr val="accent1"/>
+          </a:lnRef>
+          <a:fillRef idx="0">
+            <a:schemeClr val="accent1"/>
+          </a:fillRef>
+          <a:effectRef idx="0">
+            <a:schemeClr val="accent1"/>
+          </a:effectRef>
+          <a:fontRef idx="minor">
+            <a:schemeClr val="tx1"/>
+          </a:fontRef>
+        </p:style>
+      </p:cxnSp>
+    </p:spTree>
+    <p:extLst>
+      <p:ext uri="{BB962C8B-B14F-4D97-AF65-F5344CB8AC3E}">
+        <p14:creationId xmlns:p14="http://schemas.microsoft.com/office/powerpoint/2010/main" val="3044387246"/>
+      </p:ext>
+    </p:extLst>
+  </p:cSld>
+  <p:clrMapOvr>
+    <a:masterClrMapping/>
+  </p:clrMapOvr>
+</p:sld>
+</file>
+
+<file path=ppt/slides/slide6.xml><?xml version="1.0" encoding="utf-8"?>
+<p:sld xmlns:a="http://schemas.openxmlformats.org/drawingml/2006/main" xmlns:r="http://schemas.openxmlformats.org/officeDocument/2006/relationships" xmlns:p="http://schemas.openxmlformats.org/presentationml/2006/main">
+  <p:cSld>
+    <p:spTree>
+      <p:nvGrpSpPr>
+        <p:cNvPr id="1" name="">
+          <a:extLst>
+            <a:ext uri="{FF2B5EF4-FFF2-40B4-BE49-F238E27FC236}">
+              <a16:creationId xmlns:a16="http://schemas.microsoft.com/office/drawing/2014/main" id="{193FA997-B6F4-AE4F-784D-1A029B8D2E58}"/>
+            </a:ext>
+          </a:extLst>
+        </p:cNvPr>
+        <p:cNvGrpSpPr/>
+        <p:nvPr/>
+      </p:nvGrpSpPr>
+      <p:grpSpPr>
+        <a:xfrm>
+          <a:off x="0" y="0"/>
+          <a:ext cx="0" cy="0"/>
+          <a:chOff x="0" y="0"/>
+          <a:chExt cx="0" cy="0"/>
+        </a:xfrm>
+      </p:grpSpPr>
+      <p:sp>
+        <p:nvSpPr>
+          <p:cNvPr id="4" name="正方形/長方形 3">
+            <a:extLst>
+              <a:ext uri="{FF2B5EF4-FFF2-40B4-BE49-F238E27FC236}">
+                <a16:creationId xmlns:a16="http://schemas.microsoft.com/office/drawing/2014/main" id="{1A797238-2B2A-2FAA-AC91-8B87D379E345}"/>
+              </a:ext>
+            </a:extLst>
+          </p:cNvPr>
+          <p:cNvSpPr/>
+          <p:nvPr/>
+        </p:nvSpPr>
+        <p:spPr>
+          <a:xfrm>
+            <a:off x="8438147" y="1395443"/>
+            <a:ext cx="1440000" cy="1440000"/>
+          </a:xfrm>
+          <a:prstGeom prst="rect">
+            <a:avLst/>
+          </a:prstGeom>
+          <a:solidFill>
+            <a:schemeClr val="tx1">
+              <a:lumMod val="75000"/>
+              <a:lumOff val="25000"/>
+            </a:schemeClr>
+          </a:solidFill>
+          <a:ln>
+            <a:noFill/>
+          </a:ln>
+        </p:spPr>
+        <p:style>
+          <a:lnRef idx="2">
+            <a:schemeClr val="accent1">
+              <a:shade val="15000"/>
+            </a:schemeClr>
+          </a:lnRef>
+          <a:fillRef idx="1">
+            <a:schemeClr val="accent1"/>
+          </a:fillRef>
+          <a:effectRef idx="0">
+            <a:schemeClr val="accent1"/>
+          </a:effectRef>
+          <a:fontRef idx="minor">
+            <a:schemeClr val="lt1"/>
+          </a:fontRef>
+        </p:style>
+        <p:txBody>
+          <a:bodyPr rtlCol="0" anchor="ctr"/>
+          <a:lstStyle/>
+          <a:p>
+            <a:pPr algn="ctr"/>
+            <a:r>
+              <a:rPr kumimoji="1" lang="en-US" altLang="ja-JP" dirty="0">
+                <a:solidFill>
+                  <a:schemeClr val="bg1"/>
+                </a:solidFill>
+                <a:latin typeface="メイリオ" panose="020B0604030504040204" pitchFamily="50" charset="-128"/>
+                <a:ea typeface="メイリオ" panose="020B0604030504040204" pitchFamily="50" charset="-128"/>
+              </a:rPr>
+              <a:t>Spike-ART</a:t>
+            </a:r>
+          </a:p>
+        </p:txBody>
+      </p:sp>
+      <p:sp>
+        <p:nvSpPr>
+          <p:cNvPr id="2" name="正方形/長方形 1">
+            <a:extLst>
+              <a:ext uri="{FF2B5EF4-FFF2-40B4-BE49-F238E27FC236}">
+                <a16:creationId xmlns:a16="http://schemas.microsoft.com/office/drawing/2014/main" id="{7D346AFE-5B0D-8E53-E3B2-F1AD31131203}"/>
+              </a:ext>
+            </a:extLst>
+          </p:cNvPr>
+          <p:cNvSpPr/>
+          <p:nvPr/>
+        </p:nvSpPr>
+        <p:spPr>
+          <a:xfrm>
+            <a:off x="8438147" y="4358777"/>
+            <a:ext cx="1440000" cy="1440000"/>
+          </a:xfrm>
+          <a:prstGeom prst="rect">
+            <a:avLst/>
+          </a:prstGeom>
+          <a:solidFill>
+            <a:schemeClr val="bg1">
+              <a:lumMod val="75000"/>
+            </a:schemeClr>
+          </a:solidFill>
+          <a:ln>
+            <a:noFill/>
+          </a:ln>
+        </p:spPr>
+        <p:style>
+          <a:lnRef idx="2">
+            <a:schemeClr val="accent1">
+              <a:shade val="15000"/>
+            </a:schemeClr>
+          </a:lnRef>
+          <a:fillRef idx="1">
+            <a:schemeClr val="accent1"/>
+          </a:fillRef>
+          <a:effectRef idx="0">
+            <a:schemeClr val="accent1"/>
+          </a:effectRef>
+          <a:fontRef idx="minor">
+            <a:schemeClr val="lt1"/>
+          </a:fontRef>
+        </p:style>
+        <p:txBody>
+          <a:bodyPr rtlCol="0" anchor="ctr"/>
+          <a:lstStyle/>
+          <a:p>
+            <a:pPr algn="ctr"/>
+            <a:r>
+              <a:rPr kumimoji="1" lang="en-US" altLang="ja-JP" dirty="0">
+                <a:solidFill>
+                  <a:schemeClr val="bg1"/>
+                </a:solidFill>
+                <a:latin typeface="メイリオ" panose="020B0604030504040204" pitchFamily="50" charset="-128"/>
+                <a:ea typeface="メイリオ" panose="020B0604030504040204" pitchFamily="50" charset="-128"/>
+              </a:rPr>
+              <a:t>TOPPERS / ASP3</a:t>
+            </a:r>
+          </a:p>
+        </p:txBody>
+      </p:sp>
+      <p:sp>
+        <p:nvSpPr>
+          <p:cNvPr id="7" name="正方形/長方形 6">
+            <a:extLst>
+              <a:ext uri="{FF2B5EF4-FFF2-40B4-BE49-F238E27FC236}">
+                <a16:creationId xmlns:a16="http://schemas.microsoft.com/office/drawing/2014/main" id="{E49ED316-E773-741F-3BC4-39EB30257F7E}"/>
+              </a:ext>
+            </a:extLst>
+          </p:cNvPr>
+          <p:cNvSpPr/>
+          <p:nvPr/>
+        </p:nvSpPr>
+        <p:spPr>
+          <a:xfrm>
+            <a:off x="5376000" y="1395443"/>
+            <a:ext cx="1440000" cy="1440000"/>
+          </a:xfrm>
+          <a:prstGeom prst="rect">
+            <a:avLst/>
+          </a:prstGeom>
+          <a:solidFill>
+            <a:schemeClr val="tx1">
+              <a:lumMod val="75000"/>
+              <a:lumOff val="25000"/>
+            </a:schemeClr>
+          </a:solidFill>
+          <a:ln>
+            <a:noFill/>
+          </a:ln>
+        </p:spPr>
+        <p:style>
+          <a:lnRef idx="2">
+            <a:schemeClr val="accent1">
+              <a:shade val="15000"/>
+            </a:schemeClr>
+          </a:lnRef>
+          <a:fillRef idx="1">
+            <a:schemeClr val="accent1"/>
+          </a:fillRef>
+          <a:effectRef idx="0">
+            <a:schemeClr val="accent1"/>
+          </a:effectRef>
+          <a:fontRef idx="minor">
+            <a:schemeClr val="lt1"/>
+          </a:fontRef>
+        </p:style>
+        <p:txBody>
+          <a:bodyPr rtlCol="0" anchor="ctr"/>
+          <a:lstStyle/>
+          <a:p>
+            <a:pPr algn="ctr"/>
+            <a:r>
+              <a:rPr kumimoji="1" lang="en-US" altLang="ja-JP" dirty="0" err="1">
+                <a:solidFill>
+                  <a:schemeClr val="bg1"/>
+                </a:solidFill>
+                <a:latin typeface="メイリオ" panose="020B0604030504040204" pitchFamily="50" charset="-128"/>
+                <a:ea typeface="メイリオ" panose="020B0604030504040204" pitchFamily="50" charset="-128"/>
+              </a:rPr>
+              <a:t>libraspike</a:t>
+            </a:r>
+            <a:r>
+              <a:rPr kumimoji="1" lang="en-US" altLang="ja-JP" dirty="0">
+                <a:solidFill>
+                  <a:schemeClr val="bg1"/>
+                </a:solidFill>
+                <a:latin typeface="メイリオ" panose="020B0604030504040204" pitchFamily="50" charset="-128"/>
+                <a:ea typeface="メイリオ" panose="020B0604030504040204" pitchFamily="50" charset="-128"/>
+              </a:rPr>
+              <a:t>-art</a:t>
+            </a:r>
+          </a:p>
+        </p:txBody>
+      </p:sp>
+      <p:cxnSp>
+        <p:nvCxnSpPr>
+          <p:cNvPr id="13" name="直線矢印コネクタ 12">
+            <a:extLst>
+              <a:ext uri="{FF2B5EF4-FFF2-40B4-BE49-F238E27FC236}">
+                <a16:creationId xmlns:a16="http://schemas.microsoft.com/office/drawing/2014/main" id="{01504E53-93D1-226B-D026-0C39AD5DDF58}"/>
+              </a:ext>
+            </a:extLst>
+          </p:cNvPr>
+          <p:cNvCxnSpPr>
+            <a:cxnSpLocks/>
+            <a:stCxn id="7" idx="3"/>
+            <a:endCxn id="4" idx="1"/>
+          </p:cNvCxnSpPr>
+          <p:nvPr/>
+        </p:nvCxnSpPr>
+        <p:spPr>
+          <a:xfrm>
+            <a:off x="6816000" y="2115443"/>
+            <a:ext cx="1622147" cy="0"/>
+          </a:xfrm>
+          <a:prstGeom prst="straightConnector1">
+            <a:avLst/>
+          </a:prstGeom>
+          <a:ln w="57150">
+            <a:solidFill>
+              <a:schemeClr val="tx1">
+                <a:lumMod val="50000"/>
+                <a:lumOff val="50000"/>
+              </a:schemeClr>
+            </a:solidFill>
+            <a:tailEnd type="triangle"/>
+          </a:ln>
+        </p:spPr>
+        <p:style>
+          <a:lnRef idx="1">
+            <a:schemeClr val="accent1"/>
+          </a:lnRef>
+          <a:fillRef idx="0">
+            <a:schemeClr val="accent1"/>
+          </a:fillRef>
+          <a:effectRef idx="0">
+            <a:schemeClr val="accent1"/>
+          </a:effectRef>
+          <a:fontRef idx="minor">
+            <a:schemeClr val="tx1"/>
+          </a:fontRef>
+        </p:style>
+      </p:cxnSp>
+    </p:spTree>
+    <p:extLst>
+      <p:ext uri="{BB962C8B-B14F-4D97-AF65-F5344CB8AC3E}">
+        <p14:creationId xmlns:p14="http://schemas.microsoft.com/office/powerpoint/2010/main" val="29946032"/>
+      </p:ext>
+    </p:extLst>
+  </p:cSld>
+  <p:clrMapOvr>
+    <a:masterClrMapping/>
+  </p:clrMapOvr>
+</p:sld>
+</file>
+
+<file path=ppt/slides/slide7.xml><?xml version="1.0" encoding="utf-8"?>
+<p:sld xmlns:a="http://schemas.openxmlformats.org/drawingml/2006/main" xmlns:r="http://schemas.openxmlformats.org/officeDocument/2006/relationships" xmlns:p="http://schemas.openxmlformats.org/presentationml/2006/main">
+  <p:cSld>
+    <p:spTree>
+      <p:nvGrpSpPr>
+        <p:cNvPr id="1" name="">
+          <a:extLst>
+            <a:ext uri="{FF2B5EF4-FFF2-40B4-BE49-F238E27FC236}">
+              <a16:creationId xmlns:a16="http://schemas.microsoft.com/office/drawing/2014/main" id="{D5B1F1CE-ECCA-8173-E659-5C0375AFE061}"/>
+            </a:ext>
+          </a:extLst>
+        </p:cNvPr>
+        <p:cNvGrpSpPr/>
+        <p:nvPr/>
+      </p:nvGrpSpPr>
+      <p:grpSpPr>
+        <a:xfrm>
+          <a:off x="0" y="0"/>
+          <a:ext cx="0" cy="0"/>
+          <a:chOff x="0" y="0"/>
+          <a:chExt cx="0" cy="0"/>
+        </a:xfrm>
+      </p:grpSpPr>
+      <p:sp>
+        <p:nvSpPr>
+          <p:cNvPr id="4" name="正方形/長方形 3">
+            <a:extLst>
+              <a:ext uri="{FF2B5EF4-FFF2-40B4-BE49-F238E27FC236}">
+                <a16:creationId xmlns:a16="http://schemas.microsoft.com/office/drawing/2014/main" id="{BD60D1C4-F423-BD1D-3A7E-67D45AC1333A}"/>
+              </a:ext>
+            </a:extLst>
+          </p:cNvPr>
+          <p:cNvSpPr/>
+          <p:nvPr/>
+        </p:nvSpPr>
+        <p:spPr>
+          <a:xfrm>
+            <a:off x="8438147" y="1395443"/>
+            <a:ext cx="1440000" cy="1440000"/>
+          </a:xfrm>
+          <a:prstGeom prst="rect">
+            <a:avLst/>
+          </a:prstGeom>
+          <a:solidFill>
+            <a:schemeClr val="tx1">
+              <a:lumMod val="75000"/>
+              <a:lumOff val="25000"/>
+            </a:schemeClr>
+          </a:solidFill>
+          <a:ln>
+            <a:noFill/>
+          </a:ln>
+        </p:spPr>
+        <p:style>
+          <a:lnRef idx="2">
+            <a:schemeClr val="accent1">
+              <a:shade val="15000"/>
+            </a:schemeClr>
+          </a:lnRef>
+          <a:fillRef idx="1">
+            <a:schemeClr val="accent1"/>
+          </a:fillRef>
+          <a:effectRef idx="0">
+            <a:schemeClr val="accent1"/>
+          </a:effectRef>
+          <a:fontRef idx="minor">
+            <a:schemeClr val="lt1"/>
+          </a:fontRef>
+        </p:style>
+        <p:txBody>
+          <a:bodyPr rtlCol="0" anchor="ctr"/>
+          <a:lstStyle/>
+          <a:p>
+            <a:pPr algn="ctr"/>
+            <a:r>
+              <a:rPr kumimoji="1" lang="en-US" altLang="ja-JP" dirty="0">
+                <a:solidFill>
+                  <a:schemeClr val="bg1"/>
+                </a:solidFill>
+                <a:latin typeface="メイリオ" panose="020B0604030504040204" pitchFamily="50" charset="-128"/>
+                <a:ea typeface="メイリオ" panose="020B0604030504040204" pitchFamily="50" charset="-128"/>
+              </a:rPr>
+              <a:t>Spike-ART</a:t>
+            </a:r>
+          </a:p>
+        </p:txBody>
+      </p:sp>
+      <p:sp>
+        <p:nvSpPr>
+          <p:cNvPr id="2" name="正方形/長方形 1">
+            <a:extLst>
+              <a:ext uri="{FF2B5EF4-FFF2-40B4-BE49-F238E27FC236}">
+                <a16:creationId xmlns:a16="http://schemas.microsoft.com/office/drawing/2014/main" id="{B8E83F83-BA1A-1E54-0300-C54CE2E73E92}"/>
+              </a:ext>
+            </a:extLst>
+          </p:cNvPr>
+          <p:cNvSpPr/>
+          <p:nvPr/>
+        </p:nvSpPr>
+        <p:spPr>
+          <a:xfrm>
+            <a:off x="8438147" y="4358777"/>
+            <a:ext cx="1440000" cy="1440000"/>
+          </a:xfrm>
+          <a:prstGeom prst="rect">
+            <a:avLst/>
+          </a:prstGeom>
+          <a:solidFill>
+            <a:schemeClr val="bg1">
+              <a:lumMod val="75000"/>
+            </a:schemeClr>
+          </a:solidFill>
+          <a:ln>
+            <a:noFill/>
+          </a:ln>
+        </p:spPr>
+        <p:style>
+          <a:lnRef idx="2">
+            <a:schemeClr val="accent1">
+              <a:shade val="15000"/>
+            </a:schemeClr>
+          </a:lnRef>
+          <a:fillRef idx="1">
+            <a:schemeClr val="accent1"/>
+          </a:fillRef>
+          <a:effectRef idx="0">
+            <a:schemeClr val="accent1"/>
+          </a:effectRef>
+          <a:fontRef idx="minor">
+            <a:schemeClr val="lt1"/>
+          </a:fontRef>
+        </p:style>
+        <p:txBody>
+          <a:bodyPr rtlCol="0" anchor="ctr"/>
+          <a:lstStyle/>
+          <a:p>
+            <a:pPr algn="ctr"/>
+            <a:r>
+              <a:rPr kumimoji="1" lang="en-US" altLang="ja-JP" dirty="0">
+                <a:solidFill>
+                  <a:schemeClr val="bg1"/>
+                </a:solidFill>
+                <a:latin typeface="メイリオ" panose="020B0604030504040204" pitchFamily="50" charset="-128"/>
+                <a:ea typeface="メイリオ" panose="020B0604030504040204" pitchFamily="50" charset="-128"/>
+              </a:rPr>
+              <a:t>TOPPERS / ASP3</a:t>
+            </a:r>
+          </a:p>
+        </p:txBody>
+      </p:sp>
+      <p:sp>
+        <p:nvSpPr>
+          <p:cNvPr id="7" name="正方形/長方形 6">
+            <a:extLst>
+              <a:ext uri="{FF2B5EF4-FFF2-40B4-BE49-F238E27FC236}">
+                <a16:creationId xmlns:a16="http://schemas.microsoft.com/office/drawing/2014/main" id="{5B83D2E1-5EDA-9EEC-878D-9D116D47CA36}"/>
+              </a:ext>
+            </a:extLst>
+          </p:cNvPr>
+          <p:cNvSpPr/>
+          <p:nvPr/>
+        </p:nvSpPr>
+        <p:spPr>
+          <a:xfrm>
+            <a:off x="5376000" y="1395443"/>
+            <a:ext cx="1440000" cy="1440000"/>
+          </a:xfrm>
+          <a:prstGeom prst="rect">
+            <a:avLst/>
+          </a:prstGeom>
+          <a:solidFill>
+            <a:schemeClr val="tx1">
+              <a:lumMod val="75000"/>
+              <a:lumOff val="25000"/>
+            </a:schemeClr>
+          </a:solidFill>
+          <a:ln>
+            <a:noFill/>
+          </a:ln>
+        </p:spPr>
+        <p:style>
+          <a:lnRef idx="2">
+            <a:schemeClr val="accent1">
+              <a:shade val="15000"/>
+            </a:schemeClr>
+          </a:lnRef>
+          <a:fillRef idx="1">
+            <a:schemeClr val="accent1"/>
+          </a:fillRef>
+          <a:effectRef idx="0">
+            <a:schemeClr val="accent1"/>
+          </a:effectRef>
+          <a:fontRef idx="minor">
+            <a:schemeClr val="lt1"/>
+          </a:fontRef>
+        </p:style>
+        <p:txBody>
+          <a:bodyPr rtlCol="0" anchor="ctr"/>
+          <a:lstStyle/>
+          <a:p>
+            <a:pPr algn="ctr"/>
+            <a:r>
+              <a:rPr kumimoji="1" lang="en-US" altLang="ja-JP" dirty="0" err="1">
+                <a:solidFill>
+                  <a:schemeClr val="bg1"/>
+                </a:solidFill>
+                <a:latin typeface="メイリオ" panose="020B0604030504040204" pitchFamily="50" charset="-128"/>
+                <a:ea typeface="メイリオ" panose="020B0604030504040204" pitchFamily="50" charset="-128"/>
+              </a:rPr>
+              <a:t>libraspike</a:t>
+            </a:r>
+            <a:r>
+              <a:rPr kumimoji="1" lang="en-US" altLang="ja-JP" dirty="0">
+                <a:solidFill>
+                  <a:schemeClr val="bg1"/>
+                </a:solidFill>
+                <a:latin typeface="メイリオ" panose="020B0604030504040204" pitchFamily="50" charset="-128"/>
+                <a:ea typeface="メイリオ" panose="020B0604030504040204" pitchFamily="50" charset="-128"/>
+              </a:rPr>
+              <a:t>-art</a:t>
+            </a:r>
+          </a:p>
+        </p:txBody>
+      </p:sp>
+      <p:cxnSp>
+        <p:nvCxnSpPr>
+          <p:cNvPr id="13" name="直線矢印コネクタ 12">
+            <a:extLst>
+              <a:ext uri="{FF2B5EF4-FFF2-40B4-BE49-F238E27FC236}">
+                <a16:creationId xmlns:a16="http://schemas.microsoft.com/office/drawing/2014/main" id="{299165D7-9F3A-1ADC-1D3E-1FE92423FDCF}"/>
+              </a:ext>
+            </a:extLst>
+          </p:cNvPr>
+          <p:cNvCxnSpPr>
+            <a:cxnSpLocks/>
+            <a:stCxn id="7" idx="3"/>
+            <a:endCxn id="4" idx="1"/>
+          </p:cNvCxnSpPr>
+          <p:nvPr/>
+        </p:nvCxnSpPr>
+        <p:spPr>
+          <a:xfrm>
+            <a:off x="6816000" y="2115443"/>
+            <a:ext cx="1622147" cy="0"/>
+          </a:xfrm>
+          <a:prstGeom prst="straightConnector1">
+            <a:avLst/>
+          </a:prstGeom>
+          <a:ln w="57150">
+            <a:solidFill>
+              <a:schemeClr val="tx1">
+                <a:lumMod val="50000"/>
+                <a:lumOff val="50000"/>
+              </a:schemeClr>
+            </a:solidFill>
+            <a:tailEnd type="triangle"/>
+          </a:ln>
+        </p:spPr>
+        <p:style>
+          <a:lnRef idx="1">
+            <a:schemeClr val="accent1"/>
+          </a:lnRef>
+          <a:fillRef idx="0">
+            <a:schemeClr val="accent1"/>
+          </a:fillRef>
+          <a:effectRef idx="0">
+            <a:schemeClr val="accent1"/>
+          </a:effectRef>
+          <a:fontRef idx="minor">
+            <a:schemeClr val="tx1"/>
+          </a:fontRef>
+        </p:style>
+      </p:cxnSp>
+      <p:sp>
+        <p:nvSpPr>
+          <p:cNvPr id="5" name="正方形/長方形 4">
+            <a:extLst>
+              <a:ext uri="{FF2B5EF4-FFF2-40B4-BE49-F238E27FC236}">
+                <a16:creationId xmlns:a16="http://schemas.microsoft.com/office/drawing/2014/main" id="{66073028-CAD4-C7AF-77D7-58541559F365}"/>
+              </a:ext>
+            </a:extLst>
+          </p:cNvPr>
+          <p:cNvSpPr/>
+          <p:nvPr/>
+        </p:nvSpPr>
+        <p:spPr>
+          <a:xfrm>
+            <a:off x="2313853" y="1395443"/>
+            <a:ext cx="1440000" cy="1440000"/>
+          </a:xfrm>
+          <a:prstGeom prst="rect">
+            <a:avLst/>
+          </a:prstGeom>
+          <a:solidFill>
+            <a:schemeClr val="tx1">
+              <a:lumMod val="75000"/>
+              <a:lumOff val="25000"/>
+            </a:schemeClr>
+          </a:solidFill>
+          <a:ln>
+            <a:noFill/>
+          </a:ln>
+        </p:spPr>
+        <p:style>
+          <a:lnRef idx="2">
+            <a:schemeClr val="accent1">
+              <a:shade val="15000"/>
+            </a:schemeClr>
+          </a:lnRef>
+          <a:fillRef idx="1">
+            <a:schemeClr val="accent1"/>
+          </a:fillRef>
+          <a:effectRef idx="0">
+            <a:schemeClr val="accent1"/>
+          </a:effectRef>
+          <a:fontRef idx="minor">
+            <a:schemeClr val="lt1"/>
+          </a:fontRef>
+        </p:style>
+        <p:txBody>
+          <a:bodyPr rtlCol="0" anchor="ctr"/>
+          <a:lstStyle/>
+          <a:p>
+            <a:pPr algn="ctr"/>
+            <a:r>
+              <a:rPr kumimoji="1" lang="en-US" altLang="ja-JP" dirty="0" err="1">
+                <a:solidFill>
+                  <a:schemeClr val="bg1"/>
+                </a:solidFill>
+                <a:latin typeface="メイリオ" panose="020B0604030504040204" pitchFamily="50" charset="-128"/>
+                <a:ea typeface="メイリオ" panose="020B0604030504040204" pitchFamily="50" charset="-128"/>
+              </a:rPr>
+              <a:t>RasPike</a:t>
+            </a:r>
+            <a:r>
+              <a:rPr kumimoji="1" lang="en-US" altLang="ja-JP" dirty="0">
+                <a:solidFill>
+                  <a:schemeClr val="bg1"/>
+                </a:solidFill>
+                <a:latin typeface="メイリオ" panose="020B0604030504040204" pitchFamily="50" charset="-128"/>
+                <a:ea typeface="メイリオ" panose="020B0604030504040204" pitchFamily="50" charset="-128"/>
+              </a:rPr>
+              <a:t>-ART</a:t>
+            </a:r>
+          </a:p>
+        </p:txBody>
+      </p:sp>
+      <p:cxnSp>
+        <p:nvCxnSpPr>
+          <p:cNvPr id="6" name="直線矢印コネクタ 5">
+            <a:extLst>
+              <a:ext uri="{FF2B5EF4-FFF2-40B4-BE49-F238E27FC236}">
+                <a16:creationId xmlns:a16="http://schemas.microsoft.com/office/drawing/2014/main" id="{1A7DCF4C-6D57-3E0E-70C6-385F112C9ED5}"/>
+              </a:ext>
+            </a:extLst>
+          </p:cNvPr>
+          <p:cNvCxnSpPr>
+            <a:cxnSpLocks/>
+            <a:stCxn id="5" idx="3"/>
+            <a:endCxn id="7" idx="1"/>
+          </p:cNvCxnSpPr>
+          <p:nvPr/>
+        </p:nvCxnSpPr>
+        <p:spPr>
+          <a:xfrm>
+            <a:off x="3753853" y="2115443"/>
+            <a:ext cx="1622147" cy="0"/>
+          </a:xfrm>
+          <a:prstGeom prst="straightConnector1">
+            <a:avLst/>
+          </a:prstGeom>
+          <a:ln w="57150">
+            <a:solidFill>
+              <a:schemeClr val="tx1">
+                <a:lumMod val="50000"/>
+                <a:lumOff val="50000"/>
+              </a:schemeClr>
+            </a:solidFill>
+            <a:tailEnd type="triangle"/>
+          </a:ln>
+        </p:spPr>
+        <p:style>
+          <a:lnRef idx="1">
+            <a:schemeClr val="accent1"/>
+          </a:lnRef>
+          <a:fillRef idx="0">
+            <a:schemeClr val="accent1"/>
+          </a:fillRef>
+          <a:effectRef idx="0">
+            <a:schemeClr val="accent1"/>
+          </a:effectRef>
+          <a:fontRef idx="minor">
+            <a:schemeClr val="tx1"/>
+          </a:fontRef>
+        </p:style>
+      </p:cxnSp>
+      <p:sp>
+        <p:nvSpPr>
+          <p:cNvPr id="12" name="正方形/長方形 11">
+            <a:extLst>
+              <a:ext uri="{FF2B5EF4-FFF2-40B4-BE49-F238E27FC236}">
+                <a16:creationId xmlns:a16="http://schemas.microsoft.com/office/drawing/2014/main" id="{4830EE85-01B8-A681-3A1F-4BFF11D48753}"/>
+              </a:ext>
+            </a:extLst>
+          </p:cNvPr>
+          <p:cNvSpPr/>
+          <p:nvPr/>
+        </p:nvSpPr>
+        <p:spPr>
+          <a:xfrm>
+            <a:off x="2313853" y="4358777"/>
+            <a:ext cx="1440000" cy="1440000"/>
+          </a:xfrm>
+          <a:prstGeom prst="rect">
+            <a:avLst/>
+          </a:prstGeom>
+          <a:solidFill>
+            <a:schemeClr val="tx1">
+              <a:lumMod val="75000"/>
+              <a:lumOff val="25000"/>
+            </a:schemeClr>
+          </a:solidFill>
+          <a:ln>
+            <a:noFill/>
+          </a:ln>
+        </p:spPr>
+        <p:style>
+          <a:lnRef idx="2">
+            <a:schemeClr val="accent1">
+              <a:shade val="15000"/>
+            </a:schemeClr>
+          </a:lnRef>
+          <a:fillRef idx="1">
+            <a:schemeClr val="accent1"/>
+          </a:fillRef>
+          <a:effectRef idx="0">
+            <a:schemeClr val="accent1"/>
+          </a:effectRef>
+          <a:fontRef idx="minor">
+            <a:schemeClr val="lt1"/>
+          </a:fontRef>
+        </p:style>
+        <p:txBody>
+          <a:bodyPr rtlCol="0" anchor="ctr"/>
+          <a:lstStyle/>
+          <a:p>
+            <a:pPr algn="ctr"/>
+            <a:r>
+              <a:rPr kumimoji="1" lang="en-US" altLang="ja-JP" dirty="0">
+                <a:solidFill>
+                  <a:schemeClr val="bg1"/>
+                </a:solidFill>
+                <a:latin typeface="メイリオ" panose="020B0604030504040204" pitchFamily="50" charset="-128"/>
+                <a:ea typeface="メイリオ" panose="020B0604030504040204" pitchFamily="50" charset="-128"/>
+              </a:rPr>
+              <a:t>TOPPERS/ASP3</a:t>
+            </a:r>
+          </a:p>
+        </p:txBody>
+      </p:sp>
+      <p:cxnSp>
+        <p:nvCxnSpPr>
+          <p:cNvPr id="14" name="直線矢印コネクタ 13">
+            <a:extLst>
+              <a:ext uri="{FF2B5EF4-FFF2-40B4-BE49-F238E27FC236}">
+                <a16:creationId xmlns:a16="http://schemas.microsoft.com/office/drawing/2014/main" id="{18F35BD3-65E8-41F8-D763-047DB513F3B8}"/>
+              </a:ext>
+            </a:extLst>
+          </p:cNvPr>
+          <p:cNvCxnSpPr>
+            <a:cxnSpLocks/>
+            <a:stCxn id="5" idx="2"/>
+            <a:endCxn id="12" idx="0"/>
+          </p:cNvCxnSpPr>
+          <p:nvPr/>
+        </p:nvCxnSpPr>
+        <p:spPr>
+          <a:xfrm>
+            <a:off x="3033853" y="2835443"/>
+            <a:ext cx="0" cy="1523334"/>
+          </a:xfrm>
+          <a:prstGeom prst="straightConnector1">
+            <a:avLst/>
+          </a:prstGeom>
+          <a:ln w="57150">
+            <a:solidFill>
+              <a:schemeClr val="tx1">
+                <a:lumMod val="50000"/>
+                <a:lumOff val="50000"/>
+              </a:schemeClr>
+            </a:solidFill>
+            <a:tailEnd type="triangle"/>
+          </a:ln>
+        </p:spPr>
+        <p:style>
+          <a:lnRef idx="1">
+            <a:schemeClr val="accent1"/>
+          </a:lnRef>
+          <a:fillRef idx="0">
+            <a:schemeClr val="accent1"/>
+          </a:fillRef>
+          <a:effectRef idx="0">
+            <a:schemeClr val="accent1"/>
+          </a:effectRef>
+          <a:fontRef idx="minor">
+            <a:schemeClr val="tx1"/>
+          </a:fontRef>
+        </p:style>
+      </p:cxnSp>
+    </p:spTree>
+    <p:extLst>
+      <p:ext uri="{BB962C8B-B14F-4D97-AF65-F5344CB8AC3E}">
+        <p14:creationId xmlns:p14="http://schemas.microsoft.com/office/powerpoint/2010/main" val="1904165943"/>
+      </p:ext>
+    </p:extLst>
+  </p:cSld>
+  <p:clrMapOvr>
+    <a:masterClrMapping/>
+  </p:clrMapOvr>
+</p:sld>
+</file>
+
+<file path=ppt/slides/slide8.xml><?xml version="1.0" encoding="utf-8"?>
+<p:sld xmlns:a="http://schemas.openxmlformats.org/drawingml/2006/main" xmlns:r="http://schemas.openxmlformats.org/officeDocument/2006/relationships" xmlns:p="http://schemas.openxmlformats.org/presentationml/2006/main">
+  <p:cSld>
+    <p:spTree>
+      <p:nvGrpSpPr>
+        <p:cNvPr id="1" name="">
+          <a:extLst>
+            <a:ext uri="{FF2B5EF4-FFF2-40B4-BE49-F238E27FC236}">
+              <a16:creationId xmlns:a16="http://schemas.microsoft.com/office/drawing/2014/main" id="{13942E6B-C4BC-A840-E5F3-3ACB1695C2D5}"/>
+            </a:ext>
+          </a:extLst>
+        </p:cNvPr>
+        <p:cNvGrpSpPr/>
+        <p:nvPr/>
+      </p:nvGrpSpPr>
+      <p:grpSpPr>
+        <a:xfrm>
+          <a:off x="0" y="0"/>
+          <a:ext cx="0" cy="0"/>
+          <a:chOff x="0" y="0"/>
+          <a:chExt cx="0" cy="0"/>
+        </a:xfrm>
+      </p:grpSpPr>
+      <p:sp>
+        <p:nvSpPr>
+          <p:cNvPr id="4" name="正方形/長方形 3">
+            <a:extLst>
+              <a:ext uri="{FF2B5EF4-FFF2-40B4-BE49-F238E27FC236}">
+                <a16:creationId xmlns:a16="http://schemas.microsoft.com/office/drawing/2014/main" id="{BB30DF89-70AB-7E22-BB22-D0D65C2BC53C}"/>
+              </a:ext>
+            </a:extLst>
+          </p:cNvPr>
+          <p:cNvSpPr/>
+          <p:nvPr/>
+        </p:nvSpPr>
+        <p:spPr>
+          <a:xfrm>
+            <a:off x="8438147" y="1395443"/>
+            <a:ext cx="1440000" cy="1440000"/>
+          </a:xfrm>
+          <a:prstGeom prst="rect">
+            <a:avLst/>
+          </a:prstGeom>
+          <a:solidFill>
+            <a:schemeClr val="tx1">
+              <a:lumMod val="75000"/>
+              <a:lumOff val="25000"/>
+            </a:schemeClr>
+          </a:solidFill>
+          <a:ln>
+            <a:noFill/>
+          </a:ln>
+        </p:spPr>
+        <p:style>
+          <a:lnRef idx="2">
+            <a:schemeClr val="accent1">
+              <a:shade val="15000"/>
+            </a:schemeClr>
+          </a:lnRef>
+          <a:fillRef idx="1">
+            <a:schemeClr val="accent1"/>
+          </a:fillRef>
+          <a:effectRef idx="0">
+            <a:schemeClr val="accent1"/>
+          </a:effectRef>
+          <a:fontRef idx="minor">
+            <a:schemeClr val="lt1"/>
+          </a:fontRef>
+        </p:style>
+        <p:txBody>
+          <a:bodyPr rtlCol="0" anchor="ctr"/>
+          <a:lstStyle/>
+          <a:p>
+            <a:pPr algn="ctr"/>
+            <a:r>
+              <a:rPr kumimoji="1" lang="en-US" altLang="ja-JP" dirty="0">
+                <a:solidFill>
+                  <a:schemeClr val="bg1"/>
+                </a:solidFill>
+                <a:latin typeface="メイリオ" panose="020B0604030504040204" pitchFamily="50" charset="-128"/>
+                <a:ea typeface="メイリオ" panose="020B0604030504040204" pitchFamily="50" charset="-128"/>
+              </a:rPr>
+              <a:t>Spike-ART</a:t>
+            </a:r>
+          </a:p>
+        </p:txBody>
+      </p:sp>
+      <p:sp>
+        <p:nvSpPr>
+          <p:cNvPr id="2" name="正方形/長方形 1">
+            <a:extLst>
+              <a:ext uri="{FF2B5EF4-FFF2-40B4-BE49-F238E27FC236}">
+                <a16:creationId xmlns:a16="http://schemas.microsoft.com/office/drawing/2014/main" id="{60A4192C-2286-F08C-6B63-A12D2B90B07F}"/>
+              </a:ext>
+            </a:extLst>
+          </p:cNvPr>
+          <p:cNvSpPr/>
+          <p:nvPr/>
+        </p:nvSpPr>
+        <p:spPr>
+          <a:xfrm>
+            <a:off x="8438147" y="4358777"/>
+            <a:ext cx="1440000" cy="1440000"/>
+          </a:xfrm>
+          <a:prstGeom prst="rect">
+            <a:avLst/>
+          </a:prstGeom>
+          <a:solidFill>
+            <a:schemeClr val="bg1">
+              <a:lumMod val="75000"/>
+            </a:schemeClr>
+          </a:solidFill>
+          <a:ln>
+            <a:noFill/>
+          </a:ln>
+        </p:spPr>
+        <p:style>
+          <a:lnRef idx="2">
+            <a:schemeClr val="accent1">
+              <a:shade val="15000"/>
+            </a:schemeClr>
+          </a:lnRef>
+          <a:fillRef idx="1">
+            <a:schemeClr val="accent1"/>
+          </a:fillRef>
+          <a:effectRef idx="0">
+            <a:schemeClr val="accent1"/>
+          </a:effectRef>
+          <a:fontRef idx="minor">
+            <a:schemeClr val="lt1"/>
+          </a:fontRef>
+        </p:style>
+        <p:txBody>
+          <a:bodyPr rtlCol="0" anchor="ctr"/>
+          <a:lstStyle/>
+          <a:p>
+            <a:pPr algn="ctr"/>
+            <a:r>
+              <a:rPr kumimoji="1" lang="en-US" altLang="ja-JP" dirty="0">
+                <a:solidFill>
+                  <a:schemeClr val="bg1"/>
+                </a:solidFill>
+                <a:latin typeface="メイリオ" panose="020B0604030504040204" pitchFamily="50" charset="-128"/>
+                <a:ea typeface="メイリオ" panose="020B0604030504040204" pitchFamily="50" charset="-128"/>
+              </a:rPr>
+              <a:t>TOPPERS / ASP3</a:t>
+            </a:r>
+          </a:p>
+        </p:txBody>
+      </p:sp>
+      <p:sp>
+        <p:nvSpPr>
+          <p:cNvPr id="7" name="正方形/長方形 6">
+            <a:extLst>
+              <a:ext uri="{FF2B5EF4-FFF2-40B4-BE49-F238E27FC236}">
+                <a16:creationId xmlns:a16="http://schemas.microsoft.com/office/drawing/2014/main" id="{EBA62516-5FF6-BB4B-2A12-0093D35CE4EC}"/>
+              </a:ext>
+            </a:extLst>
+          </p:cNvPr>
+          <p:cNvSpPr/>
+          <p:nvPr/>
+        </p:nvSpPr>
+        <p:spPr>
+          <a:xfrm>
+            <a:off x="5376000" y="1395443"/>
+            <a:ext cx="1440000" cy="1440000"/>
+          </a:xfrm>
+          <a:prstGeom prst="rect">
+            <a:avLst/>
+          </a:prstGeom>
+          <a:solidFill>
+            <a:schemeClr val="tx1">
+              <a:lumMod val="75000"/>
+              <a:lumOff val="25000"/>
+            </a:schemeClr>
+          </a:solidFill>
+          <a:ln>
+            <a:noFill/>
+          </a:ln>
+        </p:spPr>
+        <p:style>
+          <a:lnRef idx="2">
+            <a:schemeClr val="accent1">
+              <a:shade val="15000"/>
+            </a:schemeClr>
+          </a:lnRef>
+          <a:fillRef idx="1">
+            <a:schemeClr val="accent1"/>
+          </a:fillRef>
+          <a:effectRef idx="0">
+            <a:schemeClr val="accent1"/>
+          </a:effectRef>
+          <a:fontRef idx="minor">
+            <a:schemeClr val="lt1"/>
+          </a:fontRef>
+        </p:style>
+        <p:txBody>
+          <a:bodyPr rtlCol="0" anchor="ctr"/>
+          <a:lstStyle/>
+          <a:p>
+            <a:pPr algn="ctr"/>
+            <a:r>
+              <a:rPr kumimoji="1" lang="en-US" altLang="ja-JP" dirty="0" err="1">
+                <a:solidFill>
+                  <a:schemeClr val="bg1"/>
+                </a:solidFill>
+                <a:latin typeface="メイリオ" panose="020B0604030504040204" pitchFamily="50" charset="-128"/>
+                <a:ea typeface="メイリオ" panose="020B0604030504040204" pitchFamily="50" charset="-128"/>
+              </a:rPr>
+              <a:t>libraspike</a:t>
+            </a:r>
+            <a:r>
+              <a:rPr kumimoji="1" lang="en-US" altLang="ja-JP" dirty="0">
+                <a:solidFill>
+                  <a:schemeClr val="bg1"/>
+                </a:solidFill>
+                <a:latin typeface="メイリオ" panose="020B0604030504040204" pitchFamily="50" charset="-128"/>
+                <a:ea typeface="メイリオ" panose="020B0604030504040204" pitchFamily="50" charset="-128"/>
+              </a:rPr>
+              <a:t>-art</a:t>
+            </a:r>
+          </a:p>
+        </p:txBody>
+      </p:sp>
+      <p:cxnSp>
+        <p:nvCxnSpPr>
+          <p:cNvPr id="13" name="直線矢印コネクタ 12">
+            <a:extLst>
+              <a:ext uri="{FF2B5EF4-FFF2-40B4-BE49-F238E27FC236}">
+                <a16:creationId xmlns:a16="http://schemas.microsoft.com/office/drawing/2014/main" id="{721630D2-D2AA-53AB-235D-478AA972BB33}"/>
+              </a:ext>
+            </a:extLst>
+          </p:cNvPr>
+          <p:cNvCxnSpPr>
+            <a:cxnSpLocks/>
+            <a:stCxn id="7" idx="3"/>
+            <a:endCxn id="4" idx="1"/>
+          </p:cNvCxnSpPr>
+          <p:nvPr/>
+        </p:nvCxnSpPr>
+        <p:spPr>
+          <a:xfrm>
+            <a:off x="6816000" y="2115443"/>
+            <a:ext cx="1622147" cy="0"/>
+          </a:xfrm>
+          <a:prstGeom prst="straightConnector1">
+            <a:avLst/>
+          </a:prstGeom>
+          <a:ln w="57150">
+            <a:solidFill>
+              <a:schemeClr val="tx1">
+                <a:lumMod val="50000"/>
+                <a:lumOff val="50000"/>
+              </a:schemeClr>
+            </a:solidFill>
+            <a:tailEnd type="triangle"/>
+          </a:ln>
+        </p:spPr>
+        <p:style>
+          <a:lnRef idx="1">
+            <a:schemeClr val="accent1"/>
+          </a:lnRef>
+          <a:fillRef idx="0">
+            <a:schemeClr val="accent1"/>
+          </a:fillRef>
+          <a:effectRef idx="0">
+            <a:schemeClr val="accent1"/>
+          </a:effectRef>
+          <a:fontRef idx="minor">
+            <a:schemeClr val="tx1"/>
+          </a:fontRef>
+        </p:style>
+      </p:cxnSp>
+      <p:sp>
+        <p:nvSpPr>
+          <p:cNvPr id="5" name="正方形/長方形 4">
+            <a:extLst>
+              <a:ext uri="{FF2B5EF4-FFF2-40B4-BE49-F238E27FC236}">
+                <a16:creationId xmlns:a16="http://schemas.microsoft.com/office/drawing/2014/main" id="{EB2629D0-7B9C-8CEA-DA2E-1A1D52C4124B}"/>
+              </a:ext>
+            </a:extLst>
+          </p:cNvPr>
+          <p:cNvSpPr/>
+          <p:nvPr/>
+        </p:nvSpPr>
+        <p:spPr>
+          <a:xfrm>
+            <a:off x="2313853" y="1395443"/>
+            <a:ext cx="1440000" cy="1440000"/>
+          </a:xfrm>
+          <a:prstGeom prst="rect">
+            <a:avLst/>
+          </a:prstGeom>
+          <a:solidFill>
+            <a:schemeClr val="tx1">
+              <a:lumMod val="75000"/>
+              <a:lumOff val="25000"/>
+            </a:schemeClr>
+          </a:solidFill>
+          <a:ln>
+            <a:noFill/>
+          </a:ln>
+        </p:spPr>
+        <p:style>
+          <a:lnRef idx="2">
+            <a:schemeClr val="accent1">
+              <a:shade val="15000"/>
+            </a:schemeClr>
+          </a:lnRef>
+          <a:fillRef idx="1">
+            <a:schemeClr val="accent1"/>
+          </a:fillRef>
+          <a:effectRef idx="0">
+            <a:schemeClr val="accent1"/>
+          </a:effectRef>
+          <a:fontRef idx="minor">
+            <a:schemeClr val="lt1"/>
+          </a:fontRef>
+        </p:style>
+        <p:txBody>
+          <a:bodyPr rtlCol="0" anchor="ctr"/>
+          <a:lstStyle/>
+          <a:p>
+            <a:pPr algn="ctr"/>
+            <a:r>
+              <a:rPr kumimoji="1" lang="en-US" altLang="ja-JP" dirty="0" err="1">
+                <a:solidFill>
+                  <a:schemeClr val="bg1"/>
+                </a:solidFill>
+                <a:latin typeface="メイリオ" panose="020B0604030504040204" pitchFamily="50" charset="-128"/>
+                <a:ea typeface="メイリオ" panose="020B0604030504040204" pitchFamily="50" charset="-128"/>
+              </a:rPr>
+              <a:t>RasPike</a:t>
+            </a:r>
+            <a:r>
+              <a:rPr kumimoji="1" lang="en-US" altLang="ja-JP" dirty="0">
+                <a:solidFill>
+                  <a:schemeClr val="bg1"/>
+                </a:solidFill>
+                <a:latin typeface="メイリオ" panose="020B0604030504040204" pitchFamily="50" charset="-128"/>
+                <a:ea typeface="メイリオ" panose="020B0604030504040204" pitchFamily="50" charset="-128"/>
+              </a:rPr>
+              <a:t>-ART</a:t>
+            </a:r>
+          </a:p>
+        </p:txBody>
+      </p:sp>
+      <p:cxnSp>
+        <p:nvCxnSpPr>
+          <p:cNvPr id="6" name="直線矢印コネクタ 5">
+            <a:extLst>
+              <a:ext uri="{FF2B5EF4-FFF2-40B4-BE49-F238E27FC236}">
+                <a16:creationId xmlns:a16="http://schemas.microsoft.com/office/drawing/2014/main" id="{336D54B6-CC9C-3CE2-F547-C8268C3992B1}"/>
+              </a:ext>
+            </a:extLst>
+          </p:cNvPr>
+          <p:cNvCxnSpPr>
+            <a:cxnSpLocks/>
+            <a:stCxn id="5" idx="3"/>
+            <a:endCxn id="7" idx="1"/>
+          </p:cNvCxnSpPr>
+          <p:nvPr/>
+        </p:nvCxnSpPr>
+        <p:spPr>
+          <a:xfrm>
+            <a:off x="3753853" y="2115443"/>
+            <a:ext cx="1622147" cy="0"/>
+          </a:xfrm>
+          <a:prstGeom prst="straightConnector1">
+            <a:avLst/>
+          </a:prstGeom>
+          <a:ln w="57150">
+            <a:solidFill>
+              <a:schemeClr val="tx1">
+                <a:lumMod val="50000"/>
+                <a:lumOff val="50000"/>
+              </a:schemeClr>
+            </a:solidFill>
+            <a:tailEnd type="triangle"/>
+          </a:ln>
+        </p:spPr>
+        <p:style>
+          <a:lnRef idx="1">
+            <a:schemeClr val="accent1"/>
+          </a:lnRef>
+          <a:fillRef idx="0">
+            <a:schemeClr val="accent1"/>
+          </a:fillRef>
+          <a:effectRef idx="0">
+            <a:schemeClr val="accent1"/>
+          </a:effectRef>
+          <a:fontRef idx="minor">
+            <a:schemeClr val="tx1"/>
+          </a:fontRef>
+        </p:style>
+      </p:cxnSp>
+      <p:sp>
+        <p:nvSpPr>
+          <p:cNvPr id="12" name="正方形/長方形 11">
+            <a:extLst>
+              <a:ext uri="{FF2B5EF4-FFF2-40B4-BE49-F238E27FC236}">
+                <a16:creationId xmlns:a16="http://schemas.microsoft.com/office/drawing/2014/main" id="{F568985C-567E-EEE7-1BB6-D74DAF7406DC}"/>
+              </a:ext>
+            </a:extLst>
+          </p:cNvPr>
+          <p:cNvSpPr/>
+          <p:nvPr/>
+        </p:nvSpPr>
+        <p:spPr>
+          <a:xfrm>
+            <a:off x="2313853" y="4358777"/>
+            <a:ext cx="1440000" cy="1440000"/>
+          </a:xfrm>
+          <a:prstGeom prst="rect">
+            <a:avLst/>
+          </a:prstGeom>
+          <a:solidFill>
+            <a:schemeClr val="tx1">
+              <a:lumMod val="75000"/>
+              <a:lumOff val="25000"/>
+            </a:schemeClr>
+          </a:solidFill>
+          <a:ln>
+            <a:noFill/>
+          </a:ln>
+        </p:spPr>
+        <p:style>
+          <a:lnRef idx="2">
+            <a:schemeClr val="accent1">
+              <a:shade val="15000"/>
+            </a:schemeClr>
+          </a:lnRef>
+          <a:fillRef idx="1">
+            <a:schemeClr val="accent1"/>
+          </a:fillRef>
+          <a:effectRef idx="0">
+            <a:schemeClr val="accent1"/>
+          </a:effectRef>
+          <a:fontRef idx="minor">
+            <a:schemeClr val="lt1"/>
+          </a:fontRef>
+        </p:style>
+        <p:txBody>
+          <a:bodyPr rtlCol="0" anchor="ctr"/>
+          <a:lstStyle/>
+          <a:p>
+            <a:pPr algn="ctr"/>
+            <a:r>
+              <a:rPr kumimoji="1" lang="en-US" altLang="ja-JP" dirty="0">
+                <a:solidFill>
+                  <a:schemeClr val="bg1"/>
+                </a:solidFill>
+                <a:latin typeface="メイリオ" panose="020B0604030504040204" pitchFamily="50" charset="-128"/>
+                <a:ea typeface="メイリオ" panose="020B0604030504040204" pitchFamily="50" charset="-128"/>
+              </a:rPr>
+              <a:t>TOPPERS/ASP3</a:t>
+            </a:r>
+          </a:p>
+        </p:txBody>
+      </p:sp>
+      <p:cxnSp>
+        <p:nvCxnSpPr>
+          <p:cNvPr id="14" name="直線矢印コネクタ 13">
+            <a:extLst>
+              <a:ext uri="{FF2B5EF4-FFF2-40B4-BE49-F238E27FC236}">
+                <a16:creationId xmlns:a16="http://schemas.microsoft.com/office/drawing/2014/main" id="{125C4508-8A0F-C771-16C5-40D07F7593AB}"/>
+              </a:ext>
+            </a:extLst>
+          </p:cNvPr>
+          <p:cNvCxnSpPr>
+            <a:cxnSpLocks/>
+            <a:stCxn id="5" idx="2"/>
+            <a:endCxn id="12" idx="0"/>
+          </p:cNvCxnSpPr>
+          <p:nvPr/>
+        </p:nvCxnSpPr>
+        <p:spPr>
+          <a:xfrm>
+            <a:off x="3033853" y="2835443"/>
+            <a:ext cx="0" cy="1523334"/>
+          </a:xfrm>
+          <a:prstGeom prst="straightConnector1">
+            <a:avLst/>
+          </a:prstGeom>
+          <a:ln w="57150">
+            <a:solidFill>
+              <a:schemeClr val="tx1">
+                <a:lumMod val="50000"/>
+                <a:lumOff val="50000"/>
+              </a:schemeClr>
+            </a:solidFill>
+            <a:tailEnd type="triangle"/>
+          </a:ln>
+        </p:spPr>
+        <p:style>
+          <a:lnRef idx="1">
+            <a:schemeClr val="accent1"/>
+          </a:lnRef>
+          <a:fillRef idx="0">
+            <a:schemeClr val="accent1"/>
+          </a:fillRef>
+          <a:effectRef idx="0">
+            <a:schemeClr val="accent1"/>
+          </a:effectRef>
+          <a:fontRef idx="minor">
+            <a:schemeClr val="tx1"/>
+          </a:fontRef>
+        </p:style>
+      </p:cxnSp>
+      <p:sp>
+        <p:nvSpPr>
+          <p:cNvPr id="9" name="正方形/長方形 8">
+            <a:extLst>
+              <a:ext uri="{FF2B5EF4-FFF2-40B4-BE49-F238E27FC236}">
+                <a16:creationId xmlns:a16="http://schemas.microsoft.com/office/drawing/2014/main" id="{C29EB66B-E594-1E49-8111-C05C22D4AA9D}"/>
+              </a:ext>
+            </a:extLst>
+          </p:cNvPr>
+          <p:cNvSpPr/>
+          <p:nvPr/>
+        </p:nvSpPr>
+        <p:spPr>
+          <a:xfrm>
+            <a:off x="-566147" y="1395443"/>
+            <a:ext cx="1440000" cy="1440000"/>
+          </a:xfrm>
+          <a:prstGeom prst="rect">
+            <a:avLst/>
+          </a:prstGeom>
+          <a:solidFill>
+            <a:schemeClr val="tx1">
+              <a:lumMod val="75000"/>
+              <a:lumOff val="25000"/>
+            </a:schemeClr>
+          </a:solidFill>
+          <a:ln>
+            <a:noFill/>
+          </a:ln>
+        </p:spPr>
+        <p:style>
+          <a:lnRef idx="2">
+            <a:schemeClr val="accent1">
+              <a:shade val="15000"/>
+            </a:schemeClr>
+          </a:lnRef>
+          <a:fillRef idx="1">
+            <a:schemeClr val="accent1"/>
+          </a:fillRef>
+          <a:effectRef idx="0">
+            <a:schemeClr val="accent1"/>
+          </a:effectRef>
+          <a:fontRef idx="minor">
+            <a:schemeClr val="lt1"/>
+          </a:fontRef>
+        </p:style>
+        <p:txBody>
+          <a:bodyPr rtlCol="0" anchor="ctr"/>
+          <a:lstStyle/>
+          <a:p>
+            <a:pPr algn="ctr"/>
+            <a:r>
+              <a:rPr kumimoji="1" lang="en-US" altLang="ja-JP" dirty="0">
+                <a:solidFill>
+                  <a:schemeClr val="bg1"/>
+                </a:solidFill>
+                <a:latin typeface="メイリオ" panose="020B0604030504040204" pitchFamily="50" charset="-128"/>
+                <a:ea typeface="メイリオ" panose="020B0604030504040204" pitchFamily="50" charset="-128"/>
+              </a:rPr>
+              <a:t>tenarobo-primary-mil-2025</a:t>
+            </a:r>
+          </a:p>
+        </p:txBody>
+      </p:sp>
+      <p:cxnSp>
+        <p:nvCxnSpPr>
+          <p:cNvPr id="10" name="直線矢印コネクタ 9">
+            <a:extLst>
+              <a:ext uri="{FF2B5EF4-FFF2-40B4-BE49-F238E27FC236}">
+                <a16:creationId xmlns:a16="http://schemas.microsoft.com/office/drawing/2014/main" id="{794F1E8C-ACF8-647D-D13D-38657B7D574E}"/>
+              </a:ext>
+            </a:extLst>
+          </p:cNvPr>
+          <p:cNvCxnSpPr>
+            <a:cxnSpLocks/>
+            <a:stCxn id="9" idx="3"/>
+            <a:endCxn id="5" idx="1"/>
+          </p:cNvCxnSpPr>
+          <p:nvPr/>
+        </p:nvCxnSpPr>
+        <p:spPr>
+          <a:xfrm>
+            <a:off x="873853" y="2115443"/>
+            <a:ext cx="1440000" cy="0"/>
+          </a:xfrm>
+          <a:prstGeom prst="straightConnector1">
+            <a:avLst/>
+          </a:prstGeom>
+          <a:ln w="57150">
+            <a:solidFill>
+              <a:schemeClr val="tx1">
+                <a:lumMod val="50000"/>
+                <a:lumOff val="50000"/>
+              </a:schemeClr>
+            </a:solidFill>
+            <a:tailEnd type="triangle"/>
+          </a:ln>
+        </p:spPr>
+        <p:style>
+          <a:lnRef idx="1">
+            <a:schemeClr val="accent1"/>
+          </a:lnRef>
+          <a:fillRef idx="0">
+            <a:schemeClr val="accent1"/>
+          </a:fillRef>
+          <a:effectRef idx="0">
+            <a:schemeClr val="accent1"/>
+          </a:effectRef>
+          <a:fontRef idx="minor">
+            <a:schemeClr val="tx1"/>
+          </a:fontRef>
+        </p:style>
+      </p:cxnSp>
+    </p:spTree>
+    <p:extLst>
+      <p:ext uri="{BB962C8B-B14F-4D97-AF65-F5344CB8AC3E}">
+        <p14:creationId xmlns:p14="http://schemas.microsoft.com/office/powerpoint/2010/main" val="3493926340"/>
+      </p:ext>
+    </p:extLst>
+  </p:cSld>
+  <p:clrMapOvr>
+    <a:masterClrMapping/>
+  </p:clrMapOvr>
+</p:sld>
+</file>
+
 <file path=ppt/theme/theme1.xml><?xml version="1.0" encoding="utf-8"?>
 <a:theme xmlns:a="http://schemas.openxmlformats.org/drawingml/2006/main" name="Office テーマ">
   <a:themeElements>
@@ -5156,4 +8376,299 @@
     </a:ext>
   </a:extLst>
 </a:theme>
+</file>
+
+<file path=ppt/theme/theme2.xml><?xml version="1.0" encoding="utf-8"?>
+<a:theme xmlns:a="http://schemas.openxmlformats.org/drawingml/2006/main" name="Office テーマ">
+  <a:themeElements>
+    <a:clrScheme name="Office">
+      <a:dk1>
+        <a:sysClr val="windowText" lastClr="000000"/>
+      </a:dk1>
+      <a:lt1>
+        <a:sysClr val="window" lastClr="FFFFFF"/>
+      </a:lt1>
+      <a:dk2>
+        <a:srgbClr val="44546A"/>
+      </a:dk2>
+      <a:lt2>
+        <a:srgbClr val="E7E6E6"/>
+      </a:lt2>
+      <a:accent1>
+        <a:srgbClr val="4472C4"/>
+      </a:accent1>
+      <a:accent2>
+        <a:srgbClr val="ED7D31"/>
+      </a:accent2>
+      <a:accent3>
+        <a:srgbClr val="A5A5A5"/>
+      </a:accent3>
+      <a:accent4>
+        <a:srgbClr val="FFC000"/>
+      </a:accent4>
+      <a:accent5>
+        <a:srgbClr val="5B9BD5"/>
+      </a:accent5>
+      <a:accent6>
+        <a:srgbClr val="70AD47"/>
+      </a:accent6>
+      <a:hlink>
+        <a:srgbClr val="0563C1"/>
+      </a:hlink>
+      <a:folHlink>
+        <a:srgbClr val="954F72"/>
+      </a:folHlink>
+    </a:clrScheme>
+    <a:fontScheme name="Office">
+      <a:majorFont>
+        <a:latin typeface="游ゴシック Light" panose="020F0302020204030204"/>
+        <a:ea typeface=""/>
+        <a:cs typeface=""/>
+        <a:font script="Jpan" typeface="游ゴシック Light"/>
+        <a:font script="Hang" typeface="맑은 고딕"/>
+        <a:font script="Hans" typeface="等线 Light"/>
+        <a:font script="Hant" typeface="新細明體"/>
+        <a:font script="Arab" typeface="Times New Roman"/>
+        <a:font script="Hebr" typeface="Times New Roman"/>
+        <a:font script="Thai" typeface="Angsana New"/>
+        <a:font script="Ethi" typeface="Nyala"/>
+        <a:font script="Beng" typeface="Vrinda"/>
+        <a:font script="Gujr" typeface="Shruti"/>
+        <a:font script="Khmr" typeface="MoolBoran"/>
+        <a:font script="Knda" typeface="Tunga"/>
+        <a:font script="Guru" typeface="Raavi"/>
+        <a:font script="Cans" typeface="Euphemia"/>
+        <a:font script="Cher" typeface="Plantagenet Cherokee"/>
+        <a:font script="Yiii" typeface="Microsoft Yi Baiti"/>
+        <a:font script="Tibt" typeface="Microsoft Himalaya"/>
+        <a:font script="Thaa" typeface="MV Boli"/>
+        <a:font script="Deva" typeface="Mangal"/>
+        <a:font script="Telu" typeface="Gautami"/>
+        <a:font script="Taml" typeface="Latha"/>
+        <a:font script="Syrc" typeface="Estrangelo Edessa"/>
+        <a:font script="Orya" typeface="Kalinga"/>
+        <a:font script="Mlym" typeface="Kartika"/>
+        <a:font script="Laoo" typeface="DokChampa"/>
+        <a:font script="Sinh" typeface="Iskoola Pota"/>
+        <a:font script="Mong" typeface="Mongolian Baiti"/>
+        <a:font script="Viet" typeface="Times New Roman"/>
+        <a:font script="Uigh" typeface="Microsoft Uighur"/>
+        <a:font script="Geor" typeface="Sylfaen"/>
+        <a:font script="Armn" typeface="Arial"/>
+        <a:font script="Bugi" typeface="Leelawadee UI"/>
+        <a:font script="Bopo" typeface="Microsoft JhengHei"/>
+        <a:font script="Java" typeface="Javanese Text"/>
+        <a:font script="Lisu" typeface="Segoe UI"/>
+        <a:font script="Mymr" typeface="Myanmar Text"/>
+        <a:font script="Nkoo" typeface="Ebrima"/>
+        <a:font script="Olck" typeface="Nirmala UI"/>
+        <a:font script="Osma" typeface="Ebrima"/>
+        <a:font script="Phag" typeface="Phagspa"/>
+        <a:font script="Syrn" typeface="Estrangelo Edessa"/>
+        <a:font script="Syrj" typeface="Estrangelo Edessa"/>
+        <a:font script="Syre" typeface="Estrangelo Edessa"/>
+        <a:font script="Sora" typeface="Nirmala UI"/>
+        <a:font script="Tale" typeface="Microsoft Tai Le"/>
+        <a:font script="Talu" typeface="Microsoft New Tai Lue"/>
+        <a:font script="Tfng" typeface="Ebrima"/>
+      </a:majorFont>
+      <a:minorFont>
+        <a:latin typeface="游ゴシック" panose="020F0502020204030204"/>
+        <a:ea typeface=""/>
+        <a:cs typeface=""/>
+        <a:font script="Jpan" typeface="游ゴシック"/>
+        <a:font script="Hang" typeface="맑은 고딕"/>
+        <a:font script="Hans" typeface="等线"/>
+        <a:font script="Hant" typeface="新細明體"/>
+        <a:font script="Arab" typeface="Arial"/>
+        <a:font script="Hebr" typeface="Arial"/>
+        <a:font script="Thai" typeface="Cordia New"/>
+        <a:font script="Ethi" typeface="Nyala"/>
+        <a:font script="Beng" typeface="Vrinda"/>
+        <a:font script="Gujr" typeface="Shruti"/>
+        <a:font script="Khmr" typeface="DaunPenh"/>
+        <a:font script="Knda" typeface="Tunga"/>
+        <a:font script="Guru" typeface="Raavi"/>
+        <a:font script="Cans" typeface="Euphemia"/>
+        <a:font script="Cher" typeface="Plantagenet Cherokee"/>
+        <a:font script="Yiii" typeface="Microsoft Yi Baiti"/>
+        <a:font script="Tibt" typeface="Microsoft Himalaya"/>
+        <a:font script="Thaa" typeface="MV Boli"/>
+        <a:font script="Deva" typeface="Mangal"/>
+        <a:font script="Telu" typeface="Gautami"/>
+        <a:font script="Taml" typeface="Latha"/>
+        <a:font script="Syrc" typeface="Estrangelo Edessa"/>
+        <a:font script="Orya" typeface="Kalinga"/>
+        <a:font script="Mlym" typeface="Kartika"/>
+        <a:font script="Laoo" typeface="DokChampa"/>
+        <a:font script="Sinh" typeface="Iskoola Pota"/>
+        <a:font script="Mong" typeface="Mongolian Baiti"/>
+        <a:font script="Viet" typeface="Arial"/>
+        <a:font script="Uigh" typeface="Microsoft Uighur"/>
+        <a:font script="Geor" typeface="Sylfaen"/>
+        <a:font script="Armn" typeface="Arial"/>
+        <a:font script="Bugi" typeface="Leelawadee UI"/>
+        <a:font script="Bopo" typeface="Microsoft JhengHei"/>
+        <a:font script="Java" typeface="Javanese Text"/>
+        <a:font script="Lisu" typeface="Segoe UI"/>
+        <a:font script="Mymr" typeface="Myanmar Text"/>
+        <a:font script="Nkoo" typeface="Ebrima"/>
+        <a:font script="Olck" typeface="Nirmala UI"/>
+        <a:font script="Osma" typeface="Ebrima"/>
+        <a:font script="Phag" typeface="Phagspa"/>
+        <a:font script="Syrn" typeface="Estrangelo Edessa"/>
+        <a:font script="Syrj" typeface="Estrangelo Edessa"/>
+        <a:font script="Syre" typeface="Estrangelo Edessa"/>
+        <a:font script="Sora" typeface="Nirmala UI"/>
+        <a:font script="Tale" typeface="Microsoft Tai Le"/>
+        <a:font script="Talu" typeface="Microsoft New Tai Lue"/>
+        <a:font script="Tfng" typeface="Ebrima"/>
+      </a:minorFont>
+    </a:fontScheme>
+    <a:fmtScheme name="Office">
+      <a:fillStyleLst>
+        <a:solidFill>
+          <a:schemeClr val="phClr"/>
+        </a:solidFill>
+        <a:gradFill rotWithShape="1">
+          <a:gsLst>
+            <a:gs pos="0">
+              <a:schemeClr val="phClr">
+                <a:lumMod val="110000"/>
+                <a:satMod val="105000"/>
+                <a:tint val="67000"/>
+              </a:schemeClr>
+            </a:gs>
+            <a:gs pos="50000">
+              <a:schemeClr val="phClr">
+                <a:lumMod val="105000"/>
+                <a:satMod val="103000"/>
+                <a:tint val="73000"/>
+              </a:schemeClr>
+            </a:gs>
+            <a:gs pos="100000">
+              <a:schemeClr val="phClr">
+                <a:lumMod val="105000"/>
+                <a:satMod val="109000"/>
+                <a:tint val="81000"/>
+              </a:schemeClr>
+            </a:gs>
+          </a:gsLst>
+          <a:lin ang="5400000" scaled="0"/>
+        </a:gradFill>
+        <a:gradFill rotWithShape="1">
+          <a:gsLst>
+            <a:gs pos="0">
+              <a:schemeClr val="phClr">
+                <a:satMod val="103000"/>
+                <a:lumMod val="102000"/>
+                <a:tint val="94000"/>
+              </a:schemeClr>
+            </a:gs>
+            <a:gs pos="50000">
+              <a:schemeClr val="phClr">
+                <a:satMod val="110000"/>
+                <a:lumMod val="100000"/>
+                <a:shade val="100000"/>
+              </a:schemeClr>
+            </a:gs>
+            <a:gs pos="100000">
+              <a:schemeClr val="phClr">
+                <a:lumMod val="99000"/>
+                <a:satMod val="120000"/>
+                <a:shade val="78000"/>
+              </a:schemeClr>
+            </a:gs>
+          </a:gsLst>
+          <a:lin ang="5400000" scaled="0"/>
+        </a:gradFill>
+      </a:fillStyleLst>
+      <a:lnStyleLst>
+        <a:ln w="6350" cap="flat" cmpd="sng" algn="ctr">
+          <a:solidFill>
+            <a:schemeClr val="phClr"/>
+          </a:solidFill>
+          <a:prstDash val="solid"/>
+          <a:miter lim="800000"/>
+        </a:ln>
+        <a:ln w="12700" cap="flat" cmpd="sng" algn="ctr">
+          <a:solidFill>
+            <a:schemeClr val="phClr"/>
+          </a:solidFill>
+          <a:prstDash val="solid"/>
+          <a:miter lim="800000"/>
+        </a:ln>
+        <a:ln w="19050" cap="flat" cmpd="sng" algn="ctr">
+          <a:solidFill>
+            <a:schemeClr val="phClr"/>
+          </a:solidFill>
+          <a:prstDash val="solid"/>
+          <a:miter lim="800000"/>
+        </a:ln>
+      </a:lnStyleLst>
+      <a:effectStyleLst>
+        <a:effectStyle>
+          <a:effectLst/>
+        </a:effectStyle>
+        <a:effectStyle>
+          <a:effectLst/>
+        </a:effectStyle>
+        <a:effectStyle>
+          <a:effectLst>
+            <a:outerShdw blurRad="57150" dist="19050" dir="5400000" algn="ctr" rotWithShape="0">
+              <a:srgbClr val="000000">
+                <a:alpha val="63000"/>
+              </a:srgbClr>
+            </a:outerShdw>
+          </a:effectLst>
+        </a:effectStyle>
+      </a:effectStyleLst>
+      <a:bgFillStyleLst>
+        <a:solidFill>
+          <a:schemeClr val="phClr"/>
+        </a:solidFill>
+        <a:solidFill>
+          <a:schemeClr val="phClr">
+            <a:tint val="95000"/>
+            <a:satMod val="170000"/>
+          </a:schemeClr>
+        </a:solidFill>
+        <a:gradFill rotWithShape="1">
+          <a:gsLst>
+            <a:gs pos="0">
+              <a:schemeClr val="phClr">
+                <a:tint val="93000"/>
+                <a:satMod val="150000"/>
+                <a:shade val="98000"/>
+                <a:lumMod val="102000"/>
+              </a:schemeClr>
+            </a:gs>
+            <a:gs pos="50000">
+              <a:schemeClr val="phClr">
+                <a:tint val="98000"/>
+                <a:satMod val="130000"/>
+                <a:shade val="90000"/>
+                <a:lumMod val="103000"/>
+              </a:schemeClr>
+            </a:gs>
+            <a:gs pos="100000">
+              <a:schemeClr val="phClr">
+                <a:shade val="63000"/>
+                <a:satMod val="120000"/>
+              </a:schemeClr>
+            </a:gs>
+          </a:gsLst>
+          <a:lin ang="5400000" scaled="0"/>
+        </a:gradFill>
+      </a:bgFillStyleLst>
+    </a:fmtScheme>
+  </a:themeElements>
+  <a:objectDefaults/>
+  <a:extraClrSchemeLst/>
+  <a:extLst>
+    <a:ext uri="{05A4C25C-085E-4340-85A3-A5531E510DB2}">
+      <thm15:themeFamily xmlns:thm15="http://schemas.microsoft.com/office/thememl/2012/main" name="Office Theme" id="{62F939B6-93AF-4DB8-9C6B-D6C7DFDC589F}" vid="{4A3C46E8-61CC-4603-A589-7422A47A8E4A}"/>
+    </a:ext>
+  </a:extLst>
+</a:theme>
 </file>
--- a/asset/asset-factory.pptx
+++ b/asset/asset-factory.pptx
@@ -204,7 +204,7 @@
           <a:p>
             <a:fld id="{D41B059B-4E36-4ACC-A1FF-2458B92DECBF}" type="datetimeFigureOut">
               <a:rPr kumimoji="1" lang="ja-JP" altLang="en-US" smtClean="0"/>
-              <a:t>2025/5/6</a:t>
+              <a:t>2025/5/7</a:t>
             </a:fld>
             <a:endParaRPr kumimoji="1" lang="ja-JP" altLang="en-US"/>
           </a:p>
@@ -1652,7 +1652,7 @@
           <a:p>
             <a:fld id="{E1FE23CD-F94F-414F-A11E-986D49A0FF62}" type="datetimeFigureOut">
               <a:rPr kumimoji="1" lang="ja-JP" altLang="en-US" smtClean="0"/>
-              <a:t>2025/5/6</a:t>
+              <a:t>2025/5/7</a:t>
             </a:fld>
             <a:endParaRPr kumimoji="1" lang="ja-JP" altLang="en-US"/>
           </a:p>
@@ -1882,7 +1882,7 @@
           <a:p>
             <a:fld id="{E1FE23CD-F94F-414F-A11E-986D49A0FF62}" type="datetimeFigureOut">
               <a:rPr kumimoji="1" lang="ja-JP" altLang="en-US" smtClean="0"/>
-              <a:t>2025/5/6</a:t>
+              <a:t>2025/5/7</a:t>
             </a:fld>
             <a:endParaRPr kumimoji="1" lang="ja-JP" altLang="en-US"/>
           </a:p>
@@ -2122,7 +2122,7 @@
           <a:p>
             <a:fld id="{E1FE23CD-F94F-414F-A11E-986D49A0FF62}" type="datetimeFigureOut">
               <a:rPr kumimoji="1" lang="ja-JP" altLang="en-US" smtClean="0"/>
-              <a:t>2025/5/6</a:t>
+              <a:t>2025/5/7</a:t>
             </a:fld>
             <a:endParaRPr kumimoji="1" lang="ja-JP" altLang="en-US"/>
           </a:p>
@@ -2352,7 +2352,7 @@
           <a:p>
             <a:fld id="{E1FE23CD-F94F-414F-A11E-986D49A0FF62}" type="datetimeFigureOut">
               <a:rPr kumimoji="1" lang="ja-JP" altLang="en-US" smtClean="0"/>
-              <a:t>2025/5/6</a:t>
+              <a:t>2025/5/7</a:t>
             </a:fld>
             <a:endParaRPr kumimoji="1" lang="ja-JP" altLang="en-US"/>
           </a:p>
@@ -2627,7 +2627,7 @@
           <a:p>
             <a:fld id="{E1FE23CD-F94F-414F-A11E-986D49A0FF62}" type="datetimeFigureOut">
               <a:rPr kumimoji="1" lang="ja-JP" altLang="en-US" smtClean="0"/>
-              <a:t>2025/5/6</a:t>
+              <a:t>2025/5/7</a:t>
             </a:fld>
             <a:endParaRPr kumimoji="1" lang="ja-JP" altLang="en-US"/>
           </a:p>
@@ -2956,7 +2956,7 @@
           <a:p>
             <a:fld id="{E1FE23CD-F94F-414F-A11E-986D49A0FF62}" type="datetimeFigureOut">
               <a:rPr kumimoji="1" lang="ja-JP" altLang="en-US" smtClean="0"/>
-              <a:t>2025/5/6</a:t>
+              <a:t>2025/5/7</a:t>
             </a:fld>
             <a:endParaRPr kumimoji="1" lang="ja-JP" altLang="en-US"/>
           </a:p>
@@ -3432,7 +3432,7 @@
           <a:p>
             <a:fld id="{E1FE23CD-F94F-414F-A11E-986D49A0FF62}" type="datetimeFigureOut">
               <a:rPr kumimoji="1" lang="ja-JP" altLang="en-US" smtClean="0"/>
-              <a:t>2025/5/6</a:t>
+              <a:t>2025/5/7</a:t>
             </a:fld>
             <a:endParaRPr kumimoji="1" lang="ja-JP" altLang="en-US"/>
           </a:p>
@@ -3573,7 +3573,7 @@
           <a:p>
             <a:fld id="{E1FE23CD-F94F-414F-A11E-986D49A0FF62}" type="datetimeFigureOut">
               <a:rPr kumimoji="1" lang="ja-JP" altLang="en-US" smtClean="0"/>
-              <a:t>2025/5/6</a:t>
+              <a:t>2025/5/7</a:t>
             </a:fld>
             <a:endParaRPr kumimoji="1" lang="ja-JP" altLang="en-US"/>
           </a:p>
@@ -3686,7 +3686,7 @@
           <a:p>
             <a:fld id="{E1FE23CD-F94F-414F-A11E-986D49A0FF62}" type="datetimeFigureOut">
               <a:rPr kumimoji="1" lang="ja-JP" altLang="en-US" smtClean="0"/>
-              <a:t>2025/5/6</a:t>
+              <a:t>2025/5/7</a:t>
             </a:fld>
             <a:endParaRPr kumimoji="1" lang="ja-JP" altLang="en-US"/>
           </a:p>
@@ -4029,7 +4029,7 @@
           <a:p>
             <a:fld id="{E1FE23CD-F94F-414F-A11E-986D49A0FF62}" type="datetimeFigureOut">
               <a:rPr kumimoji="1" lang="ja-JP" altLang="en-US" smtClean="0"/>
-              <a:t>2025/5/6</a:t>
+              <a:t>2025/5/7</a:t>
             </a:fld>
             <a:endParaRPr kumimoji="1" lang="ja-JP" altLang="en-US"/>
           </a:p>
@@ -4317,7 +4317,7 @@
           <a:p>
             <a:fld id="{E1FE23CD-F94F-414F-A11E-986D49A0FF62}" type="datetimeFigureOut">
               <a:rPr kumimoji="1" lang="ja-JP" altLang="en-US" smtClean="0"/>
-              <a:t>2025/5/6</a:t>
+              <a:t>2025/5/7</a:t>
             </a:fld>
             <a:endParaRPr kumimoji="1" lang="ja-JP" altLang="en-US"/>
           </a:p>
@@ -4590,7 +4590,7 @@
           <a:p>
             <a:fld id="{E1FE23CD-F94F-414F-A11E-986D49A0FF62}" type="datetimeFigureOut">
               <a:rPr kumimoji="1" lang="ja-JP" altLang="en-US" smtClean="0"/>
-              <a:t>2025/5/6</a:t>
+              <a:t>2025/5/7</a:t>
             </a:fld>
             <a:endParaRPr kumimoji="1" lang="ja-JP" altLang="en-US"/>
           </a:p>
